--- a/06_relazioni_e_parametri/Slides_v2/04b_metodo-vqe.pptx
+++ b/06_relazioni_e_parametri/Slides_v2/04b_metodo-vqe.pptx
@@ -652,7 +652,7 @@
       </p:grpSpPr>
       <p:sp>
         <p:nvSpPr>
-          <p:cNvPr id="2" name="Text 0"/>
+          <p:cNvPr id="2" name="INTRODUZIONE"/>
           <p:cNvSpPr txBox="1"/>
           <p:nvPr/>
         </p:nvSpPr>
@@ -691,7 +691,7 @@
       </p:sp>
       <p:sp>
         <p:nvSpPr>
-          <p:cNvPr id="3" name="Text 1"/>
+          <p:cNvPr id="3" name="VQE - Ansatz"/>
           <p:cNvSpPr txBox="1"/>
           <p:nvPr/>
         </p:nvSpPr>
@@ -758,7 +758,7 @@
         <mc:Choice xmlns:a14="http://schemas.microsoft.com/office/drawing/2010/main" Requires="a14">
           <p:sp>
             <p:nvSpPr>
-              <p:cNvPr id="5" name="Text 3"/>
+              <p:cNvPr id="5" name="Primitive a due qubit"/>
               <p:cNvSpPr txBox="1"/>
               <p:nvPr/>
             </p:nvSpPr>
@@ -913,29 +913,7 @@
                     <a:ea typeface="Calibri" pitchFamily="34" charset="-122"/>
                     <a:cs typeface="Calibri" pitchFamily="34" charset="-120"/>
                   </a:rPr>
-                  <a:t>- Primitive a due qubit (</a:t>
-                </a:r>
-                <a:r>
-                  <a:rPr lang="en-US" sz="2100" b="1" dirty="0" err="1">
-                    <a:solidFill>
-                      <a:srgbClr val="173A5E"/>
-                    </a:solidFill>
-                    <a:latin typeface="Calibri" pitchFamily="34" charset="0"/>
-                    <a:ea typeface="Calibri" pitchFamily="34" charset="-122"/>
-                    <a:cs typeface="Calibri" pitchFamily="34" charset="-120"/>
-                  </a:rPr>
-                  <a:t>Dimero</a:t>
-                </a:r>
-                <a:r>
-                  <a:rPr lang="en-US" sz="2100" b="1" dirty="0">
-                    <a:solidFill>
-                      <a:srgbClr val="173A5E"/>
-                    </a:solidFill>
-                    <a:latin typeface="Calibri" pitchFamily="34" charset="0"/>
-                    <a:ea typeface="Calibri" pitchFamily="34" charset="-122"/>
-                    <a:cs typeface="Calibri" pitchFamily="34" charset="-120"/>
-                  </a:rPr>
-                  <a:t>)</a:t>
+                  <a:t>- Primitive a due qubit</a:t>
                 </a:r>
                 <a:endParaRPr lang="en-US" sz="2100" dirty="0"/>
               </a:p>
@@ -945,7 +923,7 @@
         <mc:Fallback>
           <p:sp>
             <p:nvSpPr>
-              <p:cNvPr id="5" name="Text 3"/>
+              <p:cNvPr id="5" name="Primitive a due qubit"/>
               <p:cNvSpPr txBox="1">
                 <a:spLocks noRot="1" noChangeAspect="1" noMove="1" noResize="1" noEditPoints="1" noAdjustHandles="1" noChangeArrowheads="1" noChangeShapeType="1" noTextEdit="1"/>
               </p:cNvSpPr>
@@ -984,7 +962,7 @@
       </mc:AlternateContent>
       <p:pic>
         <p:nvPicPr>
-          <p:cNvPr id="32" name="Picture 31">
+          <p:cNvPr id="32" name="Primitiva RBS">
             <a:extLst>
               <a:ext uri="{FF2B5EF4-FFF2-40B4-BE49-F238E27FC236}">
                 <a16:creationId xmlns:a16="http://schemas.microsoft.com/office/drawing/2014/main" id="{81D639B5-F246-0FD2-4065-0BF8083F6980}"/>
@@ -1004,7 +982,7 @@
         </p:blipFill>
         <p:spPr>
           <a:xfrm>
-            <a:off x="832104" y="3881346"/>
+            <a:off x="640080" y="2362674"/>
             <a:ext cx="2883529" cy="1397538"/>
           </a:xfrm>
           <a:prstGeom prst="rect">
@@ -1014,7 +992,7 @@
       </p:pic>
       <p:pic>
         <p:nvPicPr>
-          <p:cNvPr id="34" name="Picture 33">
+          <p:cNvPr id="34" name="Primitiva W">
             <a:extLst>
               <a:ext uri="{FF2B5EF4-FFF2-40B4-BE49-F238E27FC236}">
                 <a16:creationId xmlns:a16="http://schemas.microsoft.com/office/drawing/2014/main" id="{C8791585-7F09-865E-220C-E61E87F7D557}"/>
@@ -1034,7 +1012,7 @@
         </p:blipFill>
         <p:spPr>
           <a:xfrm>
-            <a:off x="1167444" y="5369481"/>
+            <a:off x="640080" y="4629061"/>
             <a:ext cx="2029968" cy="1397538"/>
           </a:xfrm>
           <a:prstGeom prst="rect">
@@ -1046,7 +1024,7 @@
         <mc:Choice xmlns:a14="http://schemas.microsoft.com/office/drawing/2010/main" Requires="a14">
           <p:sp>
             <p:nvSpPr>
-              <p:cNvPr id="35" name="TextBox 34">
+              <p:cNvPr id="35" name="Espressione RBS">
                 <a:extLst>
                   <a:ext uri="{FF2B5EF4-FFF2-40B4-BE49-F238E27FC236}">
                     <a16:creationId xmlns:a16="http://schemas.microsoft.com/office/drawing/2014/main" id="{D1F96A2D-1405-EE2F-2A83-B9EA9EFA4044}"/>
@@ -1058,8 +1036,8 @@
             </p:nvSpPr>
             <p:spPr>
               <a:xfrm>
-                <a:off x="4486961" y="4489854"/>
-                <a:ext cx="2901391" cy="566630"/>
+                <a:off x="3699795" y="2775781"/>
+                <a:ext cx="3320851" cy="1643848"/>
               </a:xfrm>
               <a:prstGeom prst="rect">
                 <a:avLst/>
@@ -1293,7 +1271,23 @@
                 </a14:m>
                 <a:r>
                   <a:rPr lang="en-US" sz="1400" dirty="0"/>
-                  <a:t> -  </a:t>
+                  <a:t> - è </a:t>
+                </a:r>
+                <a:r>
+                  <a:rPr lang="en-US" sz="1400" dirty="0" err="1"/>
+                  <a:t>una</a:t>
+                </a:r>
+                <a:r>
+                  <a:rPr lang="en-US" sz="1400" dirty="0"/>
+                  <a:t> </a:t>
+                </a:r>
+                <a:r>
+                  <a:rPr lang="en-US" sz="1400" dirty="0" err="1"/>
+                  <a:t>rotazione</a:t>
+                </a:r>
+                <a:r>
+                  <a:rPr lang="en-US" sz="1400" dirty="0"/>
+                  <a:t> di Givens </a:t>
                 </a:r>
                 <a:r>
                   <a:rPr lang="en-US" sz="1400" dirty="0" err="1"/>
@@ -1301,8 +1295,112 @@
                 </a:r>
                 <a:r>
                   <a:rPr lang="en-US" sz="1400" dirty="0"/>
-                  <a:t>.</a:t>
-                </a:r>
+                  <a:t> - </a:t>
+                </a:r>
+                <a:r>
+                  <a:rPr lang="en-US" sz="1400" dirty="0" err="1"/>
+                  <a:t>coerente</a:t>
+                </a:r>
+                <a:r>
+                  <a:rPr lang="en-US" sz="1400" dirty="0"/>
+                  <a:t> con il </a:t>
+                </a:r>
+                <a:r>
+                  <a:rPr lang="en-US" sz="1400" dirty="0" err="1"/>
+                  <a:t>fatto</a:t>
+                </a:r>
+                <a:r>
+                  <a:rPr lang="en-US" sz="1400" dirty="0"/>
+                  <a:t> </a:t>
+                </a:r>
+                <a:r>
+                  <a:rPr lang="en-US" sz="1400" dirty="0" err="1"/>
+                  <a:t>che</a:t>
+                </a:r>
+                <a:r>
+                  <a:rPr lang="en-US" sz="1400" dirty="0"/>
+                  <a:t> il </a:t>
+                </a:r>
+                <a:r>
+                  <a:rPr lang="en-US" sz="1400" dirty="0" err="1"/>
+                  <a:t>vero</a:t>
+                </a:r>
+                <a:r>
+                  <a:rPr lang="en-US" sz="1400" dirty="0"/>
+                  <a:t> </a:t>
+                </a:r>
+                <a:r>
+                  <a:rPr lang="en-US" sz="1400" dirty="0" err="1"/>
+                  <a:t>stato</a:t>
+                </a:r>
+                <a:r>
+                  <a:rPr lang="en-US" sz="1400" dirty="0"/>
+                  <a:t> </a:t>
+                </a:r>
+                <a:r>
+                  <a:rPr lang="en-US" sz="1400" dirty="0" err="1"/>
+                  <a:t>fondamentale</a:t>
+                </a:r>
+                <a:r>
+                  <a:rPr lang="en-US" sz="1400" dirty="0"/>
+                  <a:t>, per </a:t>
+                </a:r>
+                <a:r>
+                  <a:rPr lang="en-US" sz="1400" dirty="0" err="1"/>
+                  <a:t>un'Hamiltoniana</a:t>
+                </a:r>
+                <a:r>
+                  <a:rPr lang="en-US" sz="1400" dirty="0"/>
+                  <a:t> </a:t>
+                </a:r>
+                <a:r>
+                  <a:rPr lang="en-US" sz="1400" dirty="0" err="1"/>
+                  <a:t>reale</a:t>
+                </a:r>
+                <a:r>
+                  <a:rPr lang="en-US" sz="1400" dirty="0"/>
+                  <a:t> come </a:t>
+                </a:r>
+                <a:r>
+                  <a:rPr lang="en-US" sz="1400" dirty="0" err="1"/>
+                  <a:t>questa</a:t>
+                </a:r>
+                <a:r>
+                  <a:rPr lang="en-US" sz="1400" dirty="0"/>
+                  <a:t>, non ha </a:t>
+                </a:r>
+                <a:r>
+                  <a:rPr lang="en-US" sz="1400" dirty="0" err="1"/>
+                  <a:t>mai</a:t>
+                </a:r>
+                <a:r>
+                  <a:rPr lang="en-US" sz="1400" dirty="0"/>
+                  <a:t> </a:t>
+                </a:r>
+                <a:r>
+                  <a:rPr lang="en-US" sz="1400" dirty="0" err="1"/>
+                  <a:t>bisogno</a:t>
+                </a:r>
+                <a:r>
+                  <a:rPr lang="en-US" sz="1400" dirty="0"/>
+                  <a:t> di </a:t>
+                </a:r>
+                <a:r>
+                  <a:rPr lang="en-US" sz="1400" dirty="0" err="1"/>
+                  <a:t>ampiezze</a:t>
+                </a:r>
+                <a:r>
+                  <a:rPr lang="en-US" sz="1400" dirty="0"/>
+                  <a:t> </a:t>
+                </a:r>
+                <a:r>
+                  <a:rPr lang="en-US" sz="1400" dirty="0" err="1"/>
+                  <a:t>complesse</a:t>
+                </a:r>
+                <a:endParaRPr lang="en-US" sz="1400" dirty="0"/>
+              </a:p>
+              <a:p>
+                <a:endParaRPr lang="en-US" sz="1400" dirty="0"/>
               </a:p>
               <a:p>
                 <a:r>
@@ -1316,7 +1414,7 @@
         <mc:Fallback>
           <p:sp>
             <p:nvSpPr>
-              <p:cNvPr id="35" name="TextBox 34">
+              <p:cNvPr id="35" name="Espressione RBS">
                 <a:extLst>
                   <a:ext uri="{FF2B5EF4-FFF2-40B4-BE49-F238E27FC236}">
                     <a16:creationId xmlns:a16="http://schemas.microsoft.com/office/drawing/2014/main" id="{D1F96A2D-1405-EE2F-2A83-B9EA9EFA4044}"/>
@@ -1330,8 +1428,8 @@
             </p:nvSpPr>
             <p:spPr>
               <a:xfrm>
-                <a:off x="4486961" y="4489854"/>
-                <a:ext cx="2901391" cy="566630"/>
+                <a:off x="3699795" y="2775781"/>
+                <a:ext cx="3320851" cy="1643848"/>
               </a:xfrm>
               <a:prstGeom prst="rect">
                 <a:avLst/>
@@ -1339,7 +1437,7 @@
               <a:blipFill>
                 <a:blip r:embed="rId6"/>
                 <a:stretch>
-                  <a:fillRect l="-630" b="-10870"/>
+                  <a:fillRect l="-550" b="-2963"/>
                 </a:stretch>
               </a:blipFill>
             </p:spPr>
@@ -1358,41 +1456,11 @@
           </p:sp>
         </mc:Fallback>
       </mc:AlternateContent>
-      <p:pic>
-        <p:nvPicPr>
-          <p:cNvPr id="37" name="Picture 36">
-            <a:extLst>
-              <a:ext uri="{FF2B5EF4-FFF2-40B4-BE49-F238E27FC236}">
-                <a16:creationId xmlns:a16="http://schemas.microsoft.com/office/drawing/2014/main" id="{1202AE6D-BA83-FC1A-5B00-CBAA8C1B0A4D}"/>
-              </a:ext>
-            </a:extLst>
-          </p:cNvPr>
-          <p:cNvPicPr>
-            <a:picLocks noChangeAspect="1"/>
-          </p:cNvPicPr>
-          <p:nvPr/>
-        </p:nvPicPr>
-        <p:blipFill>
-          <a:blip r:embed="rId7"/>
-          <a:stretch>
-            <a:fillRect/>
-          </a:stretch>
-        </p:blipFill>
-        <p:spPr>
-          <a:xfrm>
-            <a:off x="640080" y="2219686"/>
-            <a:ext cx="3639312" cy="1657698"/>
-          </a:xfrm>
-          <a:prstGeom prst="rect">
-            <a:avLst/>
-          </a:prstGeom>
-        </p:spPr>
-      </p:pic>
       <mc:AlternateContent xmlns:mc="http://schemas.openxmlformats.org/markup-compatibility/2006">
         <mc:Choice xmlns:a14="http://schemas.microsoft.com/office/drawing/2010/main" Requires="a14">
           <p:sp>
             <p:nvSpPr>
-              <p:cNvPr id="38" name="TextBox 37">
+              <p:cNvPr id="38" name="Espressione W">
                 <a:extLst>
                   <a:ext uri="{FF2B5EF4-FFF2-40B4-BE49-F238E27FC236}">
                     <a16:creationId xmlns:a16="http://schemas.microsoft.com/office/drawing/2014/main" id="{B0330022-6E90-2304-EB44-A37397C1474C}"/>
@@ -1404,8 +1472,8 @@
             </p:nvSpPr>
             <p:spPr>
               <a:xfrm>
-                <a:off x="4486961" y="6034727"/>
-                <a:ext cx="2901391" cy="351186"/>
+                <a:off x="3699795" y="5250924"/>
+                <a:ext cx="3320851" cy="351186"/>
               </a:xfrm>
               <a:prstGeom prst="rect">
                 <a:avLst/>
@@ -1570,7 +1638,7 @@
         <mc:Fallback>
           <p:sp>
             <p:nvSpPr>
-              <p:cNvPr id="38" name="TextBox 37">
+              <p:cNvPr id="38" name="Espressione W">
                 <a:extLst>
                   <a:ext uri="{FF2B5EF4-FFF2-40B4-BE49-F238E27FC236}">
                     <a16:creationId xmlns:a16="http://schemas.microsoft.com/office/drawing/2014/main" id="{B0330022-6E90-2304-EB44-A37397C1474C}"/>
@@ -1584,292 +1652,16 @@
             </p:nvSpPr>
             <p:spPr>
               <a:xfrm>
-                <a:off x="4486961" y="6034727"/>
-                <a:ext cx="2901391" cy="351186"/>
+                <a:off x="3699795" y="5250924"/>
+                <a:ext cx="3320851" cy="351186"/>
               </a:xfrm>
               <a:prstGeom prst="rect">
                 <a:avLst/>
               </a:prstGeom>
               <a:blipFill>
-                <a:blip r:embed="rId8"/>
+                <a:blip r:embed="rId7"/>
                 <a:stretch>
-                  <a:fillRect b="-17241"/>
-                </a:stretch>
-              </a:blipFill>
-            </p:spPr>
-            <p:txBody>
-              <a:bodyPr/>
-              <a:lstStyle/>
-              <a:p>
-                <a:r>
-                  <a:rPr lang="en-US">
-                    <a:noFill/>
-                  </a:rPr>
-                  <a:t> </a:t>
-                </a:r>
-              </a:p>
-            </p:txBody>
-          </p:sp>
-        </mc:Fallback>
-      </mc:AlternateContent>
-      <mc:AlternateContent xmlns:mc="http://schemas.openxmlformats.org/markup-compatibility/2006">
-        <mc:Choice xmlns:a14="http://schemas.microsoft.com/office/drawing/2010/main" Requires="a14">
-          <p:sp>
-            <p:nvSpPr>
-              <p:cNvPr id="39" name="TextBox 38">
-                <a:extLst>
-                  <a:ext uri="{FF2B5EF4-FFF2-40B4-BE49-F238E27FC236}">
-                    <a16:creationId xmlns:a16="http://schemas.microsoft.com/office/drawing/2014/main" id="{4DE42808-D3A4-1FF1-B937-BEF174C605C2}"/>
-                  </a:ext>
-                </a:extLst>
-              </p:cNvPr>
-              <p:cNvSpPr txBox="1"/>
-              <p:nvPr/>
-            </p:nvSpPr>
-            <p:spPr>
-              <a:xfrm>
-                <a:off x="4486961" y="2854740"/>
-                <a:ext cx="2901391" cy="574260"/>
-              </a:xfrm>
-              <a:prstGeom prst="rect">
-                <a:avLst/>
-              </a:prstGeom>
-              <a:noFill/>
-            </p:spPr>
-            <p:txBody>
-              <a:bodyPr wrap="square" rtlCol="0">
-                <a:spAutoFit/>
-              </a:bodyPr>
-              <a:lstStyle/>
-              <a:p>
-                <a14:m>
-                  <m:oMath xmlns:m="http://schemas.openxmlformats.org/officeDocument/2006/math">
-                    <m:sSub>
-                      <m:sSubPr>
-                        <m:ctrlPr>
-                          <a:rPr lang="en-US" sz="1400" i="1" dirty="0">
-                            <a:latin typeface="Cambria Math" panose="02040503050406030204" pitchFamily="18" charset="0"/>
-                          </a:rPr>
-                        </m:ctrlPr>
-                      </m:sSubPr>
-                      <m:e>
-                        <m:r>
-                          <a:rPr lang="en-US" sz="1400" i="1" dirty="0">
-                            <a:latin typeface="Cambria Math" panose="02040503050406030204" pitchFamily="18" charset="0"/>
-                          </a:rPr>
-                          <m:t>𝑊</m:t>
-                        </m:r>
-                      </m:e>
-                      <m:sub>
-                        <m:r>
-                          <a:rPr lang="en-US" sz="1400" i="1" dirty="0">
-                            <a:latin typeface="Cambria Math" panose="02040503050406030204" pitchFamily="18" charset="0"/>
-                          </a:rPr>
-                          <m:t>𝑖𝑗</m:t>
-                        </m:r>
-                      </m:sub>
-                    </m:sSub>
-                    <m:d>
-                      <m:dPr>
-                        <m:ctrlPr>
-                          <a:rPr lang="en-US" sz="1400" i="1" dirty="0">
-                            <a:latin typeface="Cambria Math" panose="02040503050406030204" pitchFamily="18" charset="0"/>
-                          </a:rPr>
-                        </m:ctrlPr>
-                      </m:dPr>
-                      <m:e>
-                        <m:r>
-                          <a:rPr lang="en-US" sz="1400" i="1" dirty="0">
-                            <a:latin typeface="Cambria Math" panose="02040503050406030204" pitchFamily="18" charset="0"/>
-                          </a:rPr>
-                          <m:t>𝜃</m:t>
-                        </m:r>
-                      </m:e>
-                    </m:d>
-                    <m:r>
-                      <a:rPr lang="en-US" sz="1400" i="1" dirty="0">
-                        <a:latin typeface="Cambria Math" panose="02040503050406030204" pitchFamily="18" charset="0"/>
-                      </a:rPr>
-                      <m:t>=</m:t>
-                    </m:r>
-                    <m:sSup>
-                      <m:sSupPr>
-                        <m:ctrlPr>
-                          <a:rPr lang="en-US" sz="1400" i="1" dirty="0">
-                            <a:latin typeface="Cambria Math" panose="02040503050406030204" pitchFamily="18" charset="0"/>
-                          </a:rPr>
-                        </m:ctrlPr>
-                      </m:sSupPr>
-                      <m:e>
-                        <m:r>
-                          <a:rPr lang="en-US" sz="1400" i="1" dirty="0">
-                            <a:latin typeface="Cambria Math" panose="02040503050406030204" pitchFamily="18" charset="0"/>
-                          </a:rPr>
-                          <m:t>𝑒</m:t>
-                        </m:r>
-                      </m:e>
-                      <m:sup>
-                        <m:r>
-                          <a:rPr lang="en-US" sz="1400" i="1" dirty="0">
-                            <a:latin typeface="Cambria Math" panose="02040503050406030204" pitchFamily="18" charset="0"/>
-                          </a:rPr>
-                          <m:t>−</m:t>
-                        </m:r>
-                        <m:r>
-                          <a:rPr lang="en-US" sz="1400" i="1" dirty="0">
-                            <a:latin typeface="Cambria Math" panose="02040503050406030204" pitchFamily="18" charset="0"/>
-                          </a:rPr>
-                          <m:t>𝑖</m:t>
-                        </m:r>
-                        <m:r>
-                          <a:rPr lang="en-US" sz="1400" i="1" dirty="0">
-                            <a:latin typeface="Cambria Math" panose="02040503050406030204" pitchFamily="18" charset="0"/>
-                          </a:rPr>
-                          <m:t>𝜃</m:t>
-                        </m:r>
-                        <m:sSub>
-                          <m:sSubPr>
-                            <m:ctrlPr>
-                              <a:rPr lang="en-US" sz="1400" i="1" dirty="0">
-                                <a:latin typeface="Cambria Math" panose="02040503050406030204" pitchFamily="18" charset="0"/>
-                              </a:rPr>
-                            </m:ctrlPr>
-                          </m:sSubPr>
-                          <m:e>
-                            <m:acc>
-                              <m:accPr>
-                                <m:chr m:val="⃗"/>
-                                <m:ctrlPr>
-                                  <a:rPr lang="en-US" sz="1400" i="1" dirty="0">
-                                    <a:latin typeface="Cambria Math" panose="02040503050406030204" pitchFamily="18" charset="0"/>
-                                  </a:rPr>
-                                </m:ctrlPr>
-                              </m:accPr>
-                              <m:e>
-                                <m:r>
-                                  <a:rPr lang="en-US" sz="1400" i="1" dirty="0">
-                                    <a:latin typeface="Cambria Math" panose="02040503050406030204" pitchFamily="18" charset="0"/>
-                                  </a:rPr>
-                                  <m:t>𝑠</m:t>
-                                </m:r>
-                              </m:e>
-                            </m:acc>
-                          </m:e>
-                          <m:sub>
-                            <m:r>
-                              <a:rPr lang="en-US" sz="1400" i="1" dirty="0">
-                                <a:latin typeface="Cambria Math" panose="02040503050406030204" pitchFamily="18" charset="0"/>
-                              </a:rPr>
-                              <m:t>𝑖</m:t>
-                            </m:r>
-                          </m:sub>
-                        </m:sSub>
-                        <m:r>
-                          <a:rPr lang="en-US" sz="1400" i="1" dirty="0">
-                            <a:latin typeface="Cambria Math" panose="02040503050406030204" pitchFamily="18" charset="0"/>
-                          </a:rPr>
-                          <m:t>⋅</m:t>
-                        </m:r>
-                        <m:sSub>
-                          <m:sSubPr>
-                            <m:ctrlPr>
-                              <a:rPr lang="en-US" sz="1400" i="1" dirty="0">
-                                <a:latin typeface="Cambria Math" panose="02040503050406030204" pitchFamily="18" charset="0"/>
-                              </a:rPr>
-                            </m:ctrlPr>
-                          </m:sSubPr>
-                          <m:e>
-                            <m:acc>
-                              <m:accPr>
-                                <m:chr m:val="⃗"/>
-                                <m:ctrlPr>
-                                  <a:rPr lang="en-US" sz="1400" i="1" dirty="0">
-                                    <a:latin typeface="Cambria Math" panose="02040503050406030204" pitchFamily="18" charset="0"/>
-                                  </a:rPr>
-                                </m:ctrlPr>
-                              </m:accPr>
-                              <m:e>
-                                <m:r>
-                                  <a:rPr lang="en-US" sz="1400" i="1" dirty="0">
-                                    <a:latin typeface="Cambria Math" panose="02040503050406030204" pitchFamily="18" charset="0"/>
-                                  </a:rPr>
-                                  <m:t>𝑠</m:t>
-                                </m:r>
-                              </m:e>
-                            </m:acc>
-                          </m:e>
-                          <m:sub>
-                            <m:r>
-                              <a:rPr lang="en-US" sz="1400" i="1" dirty="0">
-                                <a:latin typeface="Cambria Math" panose="02040503050406030204" pitchFamily="18" charset="0"/>
-                              </a:rPr>
-                              <m:t>𝑗</m:t>
-                            </m:r>
-                          </m:sub>
-                        </m:sSub>
-                      </m:sup>
-                    </m:sSup>
-                  </m:oMath>
-                </a14:m>
-                <a:r>
-                  <a:rPr lang="en-US" sz="1400" dirty="0"/>
-                  <a:t> - </a:t>
-                </a:r>
-                <a:r>
-                  <a:rPr lang="en-US" sz="1400" dirty="0" err="1"/>
-                  <a:t>complesso</a:t>
-                </a:r>
-                <a:r>
-                  <a:rPr lang="en-US" sz="1400" dirty="0"/>
-                  <a:t>,  </a:t>
-                </a:r>
-                <a:r>
-                  <a:rPr lang="en-US" sz="1400" dirty="0" err="1"/>
-                  <a:t>fase</a:t>
-                </a:r>
-                <a:r>
-                  <a:rPr lang="en-US" sz="1400" dirty="0"/>
-                  <a:t> </a:t>
-                </a:r>
-                <a:r>
-                  <a:rPr lang="en-US" sz="1400" dirty="0" err="1"/>
-                  <a:t>immaginaria</a:t>
-                </a:r>
-                <a:r>
-                  <a:rPr lang="en-US" sz="1400" dirty="0"/>
-                  <a:t> [*]</a:t>
-                </a:r>
-              </a:p>
-            </p:txBody>
-          </p:sp>
-        </mc:Choice>
-        <mc:Fallback>
-          <p:sp>
-            <p:nvSpPr>
-              <p:cNvPr id="39" name="TextBox 38">
-                <a:extLst>
-                  <a:ext uri="{FF2B5EF4-FFF2-40B4-BE49-F238E27FC236}">
-                    <a16:creationId xmlns:a16="http://schemas.microsoft.com/office/drawing/2014/main" id="{4DE42808-D3A4-1FF1-B937-BEF174C605C2}"/>
-                  </a:ext>
-                </a:extLst>
-              </p:cNvPr>
-              <p:cNvSpPr txBox="1">
-                <a:spLocks noRot="1" noChangeAspect="1" noMove="1" noResize="1" noEditPoints="1" noAdjustHandles="1" noChangeArrowheads="1" noChangeShapeType="1" noTextEdit="1"/>
-              </p:cNvSpPr>
-              <p:nvPr/>
-            </p:nvSpPr>
-            <p:spPr>
-              <a:xfrm>
-                <a:off x="4486961" y="2854740"/>
-                <a:ext cx="2901391" cy="574260"/>
-              </a:xfrm>
-              <a:prstGeom prst="rect">
-                <a:avLst/>
-              </a:prstGeom>
-              <a:blipFill>
-                <a:blip r:embed="rId9"/>
-                <a:stretch>
-                  <a:fillRect l="-630" b="-10526"/>
+                  <a:fillRect b="-18966"/>
                 </a:stretch>
               </a:blipFill>
             </p:spPr>
@@ -1892,7 +1684,7 @@
         <mc:Choice xmlns:a14="http://schemas.microsoft.com/office/drawing/2010/main" Requires="a14">
           <p:graphicFrame>
             <p:nvGraphicFramePr>
-              <p:cNvPr id="40" name="Table 39">
+              <p:cNvPr id="40" name="Tabella porte">
                 <a:extLst>
                   <a:ext uri="{FF2B5EF4-FFF2-40B4-BE49-F238E27FC236}">
                     <a16:creationId xmlns:a16="http://schemas.microsoft.com/office/drawing/2014/main" id="{A805E98D-C6DF-5C91-AD6F-7D0169040054}"/>
@@ -1905,14 +1697,14 @@
               <p:nvPr>
                 <p:extLst>
                   <p:ext uri="{D42A27DB-BD31-4B8C-83A1-F6EECF244321}">
-                    <p14:modId xmlns:p14="http://schemas.microsoft.com/office/powerpoint/2010/main" val="3586592652"/>
+                    <p14:modId xmlns:p14="http://schemas.microsoft.com/office/powerpoint/2010/main" val="2785548182"/>
                   </p:ext>
                 </p:extLst>
               </p:nvPr>
             </p:nvGraphicFramePr>
             <p:xfrm>
-              <a:off x="8129575" y="3513564"/>
-              <a:ext cx="3422040" cy="1759458"/>
+              <a:off x="8129575" y="2470019"/>
+              <a:ext cx="3422040" cy="1371600"/>
             </p:xfrm>
             <a:graphic>
               <a:graphicData uri="http://schemas.openxmlformats.org/drawingml/2006/table">
@@ -2139,98 +1931,6 @@
                       </a:ext>
                     </a:extLst>
                   </a:tr>
-                  <a:tr h="258186">
-                    <a:tc>
-                      <a:txBody>
-                        <a:bodyPr/>
-                        <a:lstStyle/>
-                        <a:p>
-                          <a:pPr/>
-                          <a14:m>
-                            <m:oMathPara xmlns:m="http://schemas.openxmlformats.org/officeDocument/2006/math">
-                              <m:oMath>
-                                <m:sSub>
-                                  <m:sSubPr>
-                                    <m:ctrlPr>
-                                      <a:rPr lang="en-US" sz="1800" i="1" dirty="0">
-                                        <a:latin typeface="Cambria Math" panose="02040503050406030204" pitchFamily="18" charset="0"/>
-                                      </a:rPr>
-                                    </m:ctrlPr>
-                                  </m:sSubPr>
-                                  <m:e>
-                                    <m:r>
-                                      <a:rPr lang="en-US" sz="1800" i="1" dirty="0">
-                                        <a:latin typeface="Cambria Math" panose="02040503050406030204" pitchFamily="18" charset="0"/>
-                                      </a:rPr>
-                                      <m:t>𝑊</m:t>
-                                    </m:r>
-                                  </m:e>
-                                  <m:sub>
-                                    <m:r>
-                                      <a:rPr lang="en-US" sz="1800" i="1" dirty="0">
-                                        <a:latin typeface="Cambria Math" panose="02040503050406030204" pitchFamily="18" charset="0"/>
-                                      </a:rPr>
-                                      <m:t>𝑖𝑗</m:t>
-                                    </m:r>
-                                  </m:sub>
-                                </m:sSub>
-                                <m:d>
-                                  <m:dPr>
-                                    <m:ctrlPr>
-                                      <a:rPr lang="en-US" sz="1800" i="1" dirty="0">
-                                        <a:latin typeface="Cambria Math" panose="02040503050406030204" pitchFamily="18" charset="0"/>
-                                      </a:rPr>
-                                    </m:ctrlPr>
-                                  </m:dPr>
-                                  <m:e>
-                                    <m:r>
-                                      <a:rPr lang="en-US" sz="1800" i="1" dirty="0">
-                                        <a:latin typeface="Cambria Math" panose="02040503050406030204" pitchFamily="18" charset="0"/>
-                                      </a:rPr>
-                                      <m:t>𝜃</m:t>
-                                    </m:r>
-                                  </m:e>
-                                </m:d>
-                              </m:oMath>
-                            </m:oMathPara>
-                          </a14:m>
-                          <a:endParaRPr lang="en-US" dirty="0"/>
-                        </a:p>
-                      </a:txBody>
-                      <a:tcPr/>
-                    </a:tc>
-                    <a:tc>
-                      <a:txBody>
-                        <a:bodyPr/>
-                        <a:lstStyle/>
-                        <a:p>
-                          <a:r>
-                            <a:rPr lang="en-US" dirty="0"/>
-                            <a:t>3</a:t>
-                          </a:r>
-                        </a:p>
-                      </a:txBody>
-                      <a:tcPr/>
-                    </a:tc>
-                    <a:tc>
-                      <a:txBody>
-                        <a:bodyPr/>
-                        <a:lstStyle/>
-                        <a:p>
-                          <a:r>
-                            <a:rPr lang="en-US" dirty="0"/>
-                            <a:t>5</a:t>
-                          </a:r>
-                        </a:p>
-                      </a:txBody>
-                      <a:tcPr/>
-                    </a:tc>
-                    <a:extLst>
-                      <a:ext uri="{0D108BD9-81ED-4DB2-BD59-A6C34878D82A}">
-                        <a16:rowId xmlns:a16="http://schemas.microsoft.com/office/drawing/2014/main" val="992101030"/>
-                      </a:ext>
-                    </a:extLst>
-                  </a:tr>
                 </a:tbl>
               </a:graphicData>
             </a:graphic>
@@ -2239,7 +1939,7 @@
         <mc:Fallback>
           <p:graphicFrame>
             <p:nvGraphicFramePr>
-              <p:cNvPr id="40" name="Table 39">
+              <p:cNvPr id="40" name="Tabella porte">
                 <a:extLst>
                   <a:ext uri="{FF2B5EF4-FFF2-40B4-BE49-F238E27FC236}">
                     <a16:creationId xmlns:a16="http://schemas.microsoft.com/office/drawing/2014/main" id="{A805E98D-C6DF-5C91-AD6F-7D0169040054}"/>
@@ -2252,14 +1952,14 @@
               <p:nvPr>
                 <p:extLst>
                   <p:ext uri="{D42A27DB-BD31-4B8C-83A1-F6EECF244321}">
-                    <p14:modId xmlns:p14="http://schemas.microsoft.com/office/powerpoint/2010/main" val="3586592652"/>
+                    <p14:modId xmlns:p14="http://schemas.microsoft.com/office/powerpoint/2010/main" val="2785548182"/>
                   </p:ext>
                 </p:extLst>
               </p:nvPr>
             </p:nvGraphicFramePr>
             <p:xfrm>
-              <a:off x="8129575" y="3513564"/>
-              <a:ext cx="3422040" cy="1759458"/>
+              <a:off x="8129575" y="2470019"/>
+              <a:ext cx="3422040" cy="1371600"/>
             </p:xfrm>
             <a:graphic>
               <a:graphicData uri="http://schemas.openxmlformats.org/drawingml/2006/table">
@@ -2351,9 +2051,9 @@
                       </a:txBody>
                       <a:tcPr>
                         <a:blipFill>
-                          <a:blip r:embed="rId10"/>
+                          <a:blip r:embed="rId8"/>
                           <a:stretch>
-                            <a:fillRect l="-535" t="-183333" r="-203209" b="-226667"/>
+                            <a:fillRect l="-535" t="-180328" r="-203209" b="-122951"/>
                           </a:stretch>
                         </a:blipFill>
                       </a:tcPr>
@@ -2401,9 +2101,9 @@
                       </a:txBody>
                       <a:tcPr>
                         <a:blipFill>
-                          <a:blip r:embed="rId10"/>
+                          <a:blip r:embed="rId8"/>
                           <a:stretch>
-                            <a:fillRect l="-535" t="-283333" r="-203209" b="-126667"/>
+                            <a:fillRect l="-535" t="-285000" r="-203209" b="-25000"/>
                           </a:stretch>
                         </a:blipFill>
                       </a:tcPr>
@@ -2440,121 +2140,17 @@
                       </a:ext>
                     </a:extLst>
                   </a:tr>
-                  <a:tr h="387858">
-                    <a:tc>
-                      <a:txBody>
-                        <a:bodyPr/>
-                        <a:lstStyle/>
-                        <a:p>
-                          <a:endParaRPr lang="en-US"/>
-                        </a:p>
-                      </a:txBody>
-                      <a:tcPr>
-                        <a:blipFill>
-                          <a:blip r:embed="rId10"/>
-                          <a:stretch>
-                            <a:fillRect l="-535" t="-359375" r="-203209" b="-18750"/>
-                          </a:stretch>
-                        </a:blipFill>
-                      </a:tcPr>
-                    </a:tc>
-                    <a:tc>
-                      <a:txBody>
-                        <a:bodyPr/>
-                        <a:lstStyle/>
-                        <a:p>
-                          <a:r>
-                            <a:rPr lang="en-US" dirty="0"/>
-                            <a:t>3</a:t>
-                          </a:r>
-                        </a:p>
-                      </a:txBody>
-                      <a:tcPr/>
-                    </a:tc>
-                    <a:tc>
-                      <a:txBody>
-                        <a:bodyPr/>
-                        <a:lstStyle/>
-                        <a:p>
-                          <a:r>
-                            <a:rPr lang="en-US" dirty="0"/>
-                            <a:t>5</a:t>
-                          </a:r>
-                        </a:p>
-                      </a:txBody>
-                      <a:tcPr/>
-                    </a:tc>
-                    <a:extLst>
-                      <a:ext uri="{0D108BD9-81ED-4DB2-BD59-A6C34878D82A}">
-                        <a16:rowId xmlns:a16="http://schemas.microsoft.com/office/drawing/2014/main" val="992101030"/>
-                      </a:ext>
-                    </a:extLst>
-                  </a:tr>
                 </a:tbl>
               </a:graphicData>
             </a:graphic>
           </p:graphicFrame>
         </mc:Fallback>
       </mc:AlternateContent>
-      <p:sp>
-        <p:nvSpPr>
-          <p:cNvPr id="41" name="TextBox 40">
-            <a:extLst>
-              <a:ext uri="{FF2B5EF4-FFF2-40B4-BE49-F238E27FC236}">
-                <a16:creationId xmlns:a16="http://schemas.microsoft.com/office/drawing/2014/main" id="{E4706F4A-9483-5611-8E90-BBE298A5371A}"/>
-              </a:ext>
-            </a:extLst>
-          </p:cNvPr>
-          <p:cNvSpPr txBox="1"/>
-          <p:nvPr/>
-        </p:nvSpPr>
-        <p:spPr>
-          <a:xfrm>
-            <a:off x="8403336" y="6528518"/>
-            <a:ext cx="3495751" cy="400110"/>
-          </a:xfrm>
-          <a:prstGeom prst="rect">
-            <a:avLst/>
-          </a:prstGeom>
-          <a:noFill/>
-        </p:spPr>
-        <p:txBody>
-          <a:bodyPr wrap="square" rtlCol="0">
-            <a:spAutoFit/>
-          </a:bodyPr>
-          <a:lstStyle/>
-          <a:p>
-            <a:r>
-              <a:rPr lang="en-US" sz="1000" dirty="0"/>
-              <a:t>* Crippa et al., </a:t>
-            </a:r>
-            <a:r>
-              <a:rPr lang="en-US" sz="1000" i="1" dirty="0"/>
-              <a:t>Magnetochemistry</a:t>
-            </a:r>
-            <a:r>
-              <a:rPr lang="en-US" sz="1000" dirty="0"/>
-              <a:t> </a:t>
-            </a:r>
-            <a:r>
-              <a:rPr lang="en-US" sz="1000" b="1" dirty="0"/>
-              <a:t>7</a:t>
-            </a:r>
-            <a:r>
-              <a:rPr lang="en-US" sz="1000" dirty="0"/>
-              <a:t>, 117 (2021), Eq. (5)-(6)</a:t>
-            </a:r>
-          </a:p>
-          <a:p>
-            <a:endParaRPr lang="en-US" sz="1000" dirty="0"/>
-          </a:p>
-        </p:txBody>
-      </p:sp>
       <mc:AlternateContent xmlns:mc="http://schemas.openxmlformats.org/markup-compatibility/2006">
         <mc:Choice xmlns:a14="http://schemas.microsoft.com/office/drawing/2010/main" Requires="a14">
           <p:sp>
             <p:nvSpPr>
-              <p:cNvPr id="43" name="TextBox 42">
+              <p:cNvPr id="43" name="Title Circuito Dimero">
                 <a:extLst>
                   <a:ext uri="{FF2B5EF4-FFF2-40B4-BE49-F238E27FC236}">
                     <a16:creationId xmlns:a16="http://schemas.microsoft.com/office/drawing/2014/main" id="{BE6BF56F-A15E-A307-5156-A586A89A37E6}"/>
@@ -2729,6 +2325,28 @@
                   </a:rPr>
                   <a:t>Quantistico</a:t>
                 </a:r>
+                <a:r>
+                  <a:rPr lang="en-US" sz="2100" b="1" dirty="0">
+                    <a:solidFill>
+                      <a:srgbClr val="173A5E"/>
+                    </a:solidFill>
+                    <a:latin typeface="Calibri" pitchFamily="34" charset="0"/>
+                    <a:ea typeface="Calibri" pitchFamily="34" charset="-122"/>
+                    <a:cs typeface="Calibri" pitchFamily="34" charset="-120"/>
+                  </a:rPr>
+                  <a:t> </a:t>
+                </a:r>
+                <a:r>
+                  <a:rPr lang="en-US" sz="2100" b="1" dirty="0" err="1">
+                    <a:solidFill>
+                      <a:srgbClr val="173A5E"/>
+                    </a:solidFill>
+                    <a:latin typeface="Calibri" pitchFamily="34" charset="0"/>
+                    <a:ea typeface="Calibri" pitchFamily="34" charset="-122"/>
+                    <a:cs typeface="Calibri" pitchFamily="34" charset="-120"/>
+                  </a:rPr>
+                  <a:t>Dimero</a:t>
+                </a:r>
                 <a:endParaRPr lang="en-US" dirty="0"/>
               </a:p>
             </p:txBody>
@@ -2737,7 +2355,7 @@
         <mc:Fallback>
           <p:sp>
             <p:nvSpPr>
-              <p:cNvPr id="43" name="TextBox 42">
+              <p:cNvPr id="43" name="Title Circuito Dimero">
                 <a:extLst>
                   <a:ext uri="{FF2B5EF4-FFF2-40B4-BE49-F238E27FC236}">
                     <a16:creationId xmlns:a16="http://schemas.microsoft.com/office/drawing/2014/main" id="{BE6BF56F-A15E-A307-5156-A586A89A37E6}"/>
@@ -2758,7 +2376,7 @@
                 <a:avLst/>
               </a:prstGeom>
               <a:blipFill>
-                <a:blip r:embed="rId11"/>
+                <a:blip r:embed="rId9"/>
                 <a:stretch>
                   <a:fillRect t="-8824" b="-27941"/>
                 </a:stretch>
@@ -2781,10 +2399,70 @@
       </mc:AlternateContent>
       <p:pic>
         <p:nvPicPr>
-          <p:cNvPr id="45" name="Image 0" descr="/home/claude/deck/assets/thesis_figs/circ_ha_hi-1.png">
+          <p:cNvPr id="45" name="Circuito HA" descr="/home/claude/deck/assets/thesis_figs/circ_ha_hi-1.png">
             <a:extLst>
               <a:ext uri="{FF2B5EF4-FFF2-40B4-BE49-F238E27FC236}">
                 <a16:creationId xmlns:a16="http://schemas.microsoft.com/office/drawing/2014/main" id="{1EE5CC7D-46B7-29D4-4BB4-0B636AD009A2}"/>
+              </a:ext>
+            </a:extLst>
+          </p:cNvPr>
+          <p:cNvPicPr>
+            <a:picLocks noChangeAspect="1"/>
+          </p:cNvPicPr>
+          <p:nvPr/>
+        </p:nvPicPr>
+        <p:blipFill>
+          <a:blip r:embed="rId10"/>
+          <a:stretch>
+            <a:fillRect/>
+          </a:stretch>
+        </p:blipFill>
+        <p:spPr>
+          <a:xfrm>
+            <a:off x="640080" y="3264408"/>
+            <a:ext cx="3320851" cy="1325880"/>
+          </a:xfrm>
+          <a:prstGeom prst="rect">
+            <a:avLst/>
+          </a:prstGeom>
+        </p:spPr>
+      </p:pic>
+      <p:pic>
+        <p:nvPicPr>
+          <p:cNvPr id="47" name="Circuito PMA base" descr="/home/claude/deck/assets/thesis_figs/circ_pma_base-1.png">
+            <a:extLst>
+              <a:ext uri="{FF2B5EF4-FFF2-40B4-BE49-F238E27FC236}">
+                <a16:creationId xmlns:a16="http://schemas.microsoft.com/office/drawing/2014/main" id="{3E2C2FE4-0132-06CB-74A2-3D08E99ACA95}"/>
+              </a:ext>
+            </a:extLst>
+          </p:cNvPr>
+          <p:cNvPicPr>
+            <a:picLocks noChangeAspect="1"/>
+          </p:cNvPicPr>
+          <p:nvPr/>
+        </p:nvPicPr>
+        <p:blipFill>
+          <a:blip r:embed="rId11"/>
+          <a:stretch>
+            <a:fillRect/>
+          </a:stretch>
+        </p:blipFill>
+        <p:spPr>
+          <a:xfrm>
+            <a:off x="7150347" y="3338699"/>
+            <a:ext cx="4278335" cy="1325880"/>
+          </a:xfrm>
+          <a:prstGeom prst="rect">
+            <a:avLst/>
+          </a:prstGeom>
+        </p:spPr>
+      </p:pic>
+      <p:pic>
+        <p:nvPicPr>
+          <p:cNvPr id="49" name="Circuito PMA esteso" descr="/home/claude/deck/assets/thesis_figs/circ_pma_esteso_hi-1.png">
+            <a:extLst>
+              <a:ext uri="{FF2B5EF4-FFF2-40B4-BE49-F238E27FC236}">
+                <a16:creationId xmlns:a16="http://schemas.microsoft.com/office/drawing/2014/main" id="{AA570C23-D55D-0B01-C6FF-459811ABB10E}"/>
               </a:ext>
             </a:extLst>
           </p:cNvPr>
@@ -2801,66 +2479,6 @@
         </p:blipFill>
         <p:spPr>
           <a:xfrm>
-            <a:off x="640080" y="3264408"/>
-            <a:ext cx="3320851" cy="1325880"/>
-          </a:xfrm>
-          <a:prstGeom prst="rect">
-            <a:avLst/>
-          </a:prstGeom>
-        </p:spPr>
-      </p:pic>
-      <p:pic>
-        <p:nvPicPr>
-          <p:cNvPr id="47" name="Image 1" descr="/home/claude/deck/assets/thesis_figs/circ_pma_base-1.png">
-            <a:extLst>
-              <a:ext uri="{FF2B5EF4-FFF2-40B4-BE49-F238E27FC236}">
-                <a16:creationId xmlns:a16="http://schemas.microsoft.com/office/drawing/2014/main" id="{3E2C2FE4-0132-06CB-74A2-3D08E99ACA95}"/>
-              </a:ext>
-            </a:extLst>
-          </p:cNvPr>
-          <p:cNvPicPr>
-            <a:picLocks noChangeAspect="1"/>
-          </p:cNvPicPr>
-          <p:nvPr/>
-        </p:nvPicPr>
-        <p:blipFill>
-          <a:blip r:embed="rId13"/>
-          <a:stretch>
-            <a:fillRect/>
-          </a:stretch>
-        </p:blipFill>
-        <p:spPr>
-          <a:xfrm>
-            <a:off x="7150347" y="3338699"/>
-            <a:ext cx="4278335" cy="1325880"/>
-          </a:xfrm>
-          <a:prstGeom prst="rect">
-            <a:avLst/>
-          </a:prstGeom>
-        </p:spPr>
-      </p:pic>
-      <p:pic>
-        <p:nvPicPr>
-          <p:cNvPr id="49" name="Image 2" descr="/home/claude/deck/assets/thesis_figs/circ_pma_esteso_hi-1.png">
-            <a:extLst>
-              <a:ext uri="{FF2B5EF4-FFF2-40B4-BE49-F238E27FC236}">
-                <a16:creationId xmlns:a16="http://schemas.microsoft.com/office/drawing/2014/main" id="{AA570C23-D55D-0B01-C6FF-459811ABB10E}"/>
-              </a:ext>
-            </a:extLst>
-          </p:cNvPr>
-          <p:cNvPicPr>
-            <a:picLocks noChangeAspect="1"/>
-          </p:cNvPicPr>
-          <p:nvPr/>
-        </p:nvPicPr>
-        <p:blipFill>
-          <a:blip r:embed="rId14"/>
-          <a:stretch>
-            <a:fillRect/>
-          </a:stretch>
-        </p:blipFill>
-        <p:spPr>
-          <a:xfrm>
             <a:off x="4279392" y="3303181"/>
             <a:ext cx="2321794" cy="1325880"/>
           </a:xfrm>
@@ -2871,7 +2489,7 @@
       </p:pic>
       <p:sp>
         <p:nvSpPr>
-          <p:cNvPr id="51" name="Text 4">
+          <p:cNvPr id="51" name="Desc HA dimero">
             <a:extLst>
               <a:ext uri="{FF2B5EF4-FFF2-40B4-BE49-F238E27FC236}">
                 <a16:creationId xmlns:a16="http://schemas.microsoft.com/office/drawing/2014/main" id="{19DF8F39-8D23-F2FB-317C-4BFF77513A58}"/>
@@ -2916,7 +2534,7 @@
       </p:sp>
       <p:sp>
         <p:nvSpPr>
-          <p:cNvPr id="55" name="Text 6">
+          <p:cNvPr id="55" name="Desc PMA Esteso dimero">
             <a:extLst>
               <a:ext uri="{FF2B5EF4-FFF2-40B4-BE49-F238E27FC236}">
                 <a16:creationId xmlns:a16="http://schemas.microsoft.com/office/drawing/2014/main" id="{69D0F071-C2D3-1EB2-B6CF-6A9D81968424}"/>
@@ -2961,7 +2579,7 @@
       </p:sp>
       <p:sp>
         <p:nvSpPr>
-          <p:cNvPr id="57" name="Text 5">
+          <p:cNvPr id="57" name="Desc PMA base dimero">
             <a:extLst>
               <a:ext uri="{FF2B5EF4-FFF2-40B4-BE49-F238E27FC236}">
                 <a16:creationId xmlns:a16="http://schemas.microsoft.com/office/drawing/2014/main" id="{3379060A-576D-FF4D-C03B-A96DE92705BB}"/>
@@ -3004,7 +2622,7 @@
       </p:sp>
       <p:sp>
         <p:nvSpPr>
-          <p:cNvPr id="58" name="TextBox 57">
+          <p:cNvPr id="58" name="Nota HA dimero">
             <a:extLst>
               <a:ext uri="{FF2B5EF4-FFF2-40B4-BE49-F238E27FC236}">
                 <a16:creationId xmlns:a16="http://schemas.microsoft.com/office/drawing/2014/main" id="{C4DA91CF-8ACC-CBFC-7DBB-B57CF5694554}"/>
@@ -3100,7 +2718,7 @@
         <mc:Choice xmlns:a14="http://schemas.microsoft.com/office/drawing/2010/main" Requires="a14">
           <p:sp>
             <p:nvSpPr>
-              <p:cNvPr id="59" name="TextBox 58">
+              <p:cNvPr id="59" name="Nota PMA base dimero">
                 <a:extLst>
                   <a:ext uri="{FF2B5EF4-FFF2-40B4-BE49-F238E27FC236}">
                     <a16:creationId xmlns:a16="http://schemas.microsoft.com/office/drawing/2014/main" id="{34AD2B12-4C8F-76F6-6C69-4E7963234E5C}"/>
@@ -3284,7 +2902,7 @@
         <mc:Fallback>
           <p:sp>
             <p:nvSpPr>
-              <p:cNvPr id="59" name="TextBox 58">
+              <p:cNvPr id="59" name="Nota PMA base dimero">
                 <a:extLst>
                   <a:ext uri="{FF2B5EF4-FFF2-40B4-BE49-F238E27FC236}">
                     <a16:creationId xmlns:a16="http://schemas.microsoft.com/office/drawing/2014/main" id="{34AD2B12-4C8F-76F6-6C69-4E7963234E5C}"/>
@@ -3305,7 +2923,7 @@
                 <a:avLst/>
               </a:prstGeom>
               <a:blipFill>
-                <a:blip r:embed="rId15"/>
+                <a:blip r:embed="rId13"/>
                 <a:stretch>
                   <a:fillRect l="-951" t="-1695" b="-6215"/>
                 </a:stretch>
@@ -3330,7 +2948,7 @@
         <mc:Choice xmlns:a14="http://schemas.microsoft.com/office/drawing/2010/main" Requires="a14">
           <p:sp>
             <p:nvSpPr>
-              <p:cNvPr id="60" name="TextBox 59">
+              <p:cNvPr id="60" name="Nota PMA esteso dimero">
                 <a:extLst>
                   <a:ext uri="{FF2B5EF4-FFF2-40B4-BE49-F238E27FC236}">
                     <a16:creationId xmlns:a16="http://schemas.microsoft.com/office/drawing/2014/main" id="{B6B4E66A-D900-83E2-5FA6-892747C7FB71}"/>
@@ -3342,7 +2960,7 @@
             </p:nvSpPr>
             <p:spPr>
               <a:xfrm>
-                <a:off x="4279392" y="5184948"/>
+                <a:off x="4330197" y="5205079"/>
                 <a:ext cx="2802905" cy="1323439"/>
               </a:xfrm>
               <a:prstGeom prst="rect">
@@ -3490,7 +3108,7 @@
         <mc:Fallback>
           <p:sp>
             <p:nvSpPr>
-              <p:cNvPr id="60" name="TextBox 59">
+              <p:cNvPr id="60" name="Nota PMA esteso dimero">
                 <a:extLst>
                   <a:ext uri="{FF2B5EF4-FFF2-40B4-BE49-F238E27FC236}">
                     <a16:creationId xmlns:a16="http://schemas.microsoft.com/office/drawing/2014/main" id="{B6B4E66A-D900-83E2-5FA6-892747C7FB71}"/>
@@ -3504,14 +3122,14 @@
             </p:nvSpPr>
             <p:spPr>
               <a:xfrm>
-                <a:off x="4279392" y="5184948"/>
+                <a:off x="4330197" y="5205079"/>
                 <a:ext cx="2802905" cy="1323439"/>
               </a:xfrm>
               <a:prstGeom prst="rect">
                 <a:avLst/>
               </a:prstGeom>
               <a:blipFill>
-                <a:blip r:embed="rId16"/>
+                <a:blip r:embed="rId14"/>
                 <a:stretch>
                   <a:fillRect l="-1087" t="-1382" b="-5069"/>
                 </a:stretch>
@@ -3536,7 +3154,7 @@
         <mc:Choice xmlns:a14="http://schemas.microsoft.com/office/drawing/2010/main" Requires="a14">
           <p:sp>
             <p:nvSpPr>
-              <p:cNvPr id="61" name="TextBox 60">
+              <p:cNvPr id="61" name="Testo preparazione dimero">
                 <a:extLst>
                   <a:ext uri="{FF2B5EF4-FFF2-40B4-BE49-F238E27FC236}">
                     <a16:creationId xmlns:a16="http://schemas.microsoft.com/office/drawing/2014/main" id="{484C8D53-7FD2-B924-14BD-0593E4C50EAC}"/>
@@ -3863,7 +3481,7 @@
         <mc:Fallback>
           <p:sp>
             <p:nvSpPr>
-              <p:cNvPr id="61" name="TextBox 60">
+              <p:cNvPr id="61" name="Testo preparazione dimero">
                 <a:extLst>
                   <a:ext uri="{FF2B5EF4-FFF2-40B4-BE49-F238E27FC236}">
                     <a16:creationId xmlns:a16="http://schemas.microsoft.com/office/drawing/2014/main" id="{484C8D53-7FD2-B924-14BD-0593E4C50EAC}"/>
@@ -3884,6 +3502,654 @@
                 <a:avLst/>
               </a:prstGeom>
               <a:blipFill>
+                <a:blip r:embed="rId15"/>
+                <a:stretch>
+                  <a:fillRect t="-2198" b="-12088"/>
+                </a:stretch>
+              </a:blipFill>
+            </p:spPr>
+            <p:txBody>
+              <a:bodyPr/>
+              <a:lstStyle/>
+              <a:p>
+                <a:r>
+                  <a:rPr lang="en-US">
+                    <a:noFill/>
+                  </a:rPr>
+                  <a:t> </a:t>
+                </a:r>
+              </a:p>
+            </p:txBody>
+          </p:sp>
+        </mc:Fallback>
+      </mc:AlternateContent>
+      <mc:AlternateContent xmlns:mc="http://schemas.openxmlformats.org/markup-compatibility/2006">
+        <mc:Choice xmlns:a14="http://schemas.microsoft.com/office/drawing/2010/main" Requires="a14">
+          <p:sp>
+            <p:nvSpPr>
+              <p:cNvPr id="7" name="Title Circuito Trimero">
+                <a:extLst>
+                  <a:ext uri="{FF2B5EF4-FFF2-40B4-BE49-F238E27FC236}">
+                    <a16:creationId xmlns:a16="http://schemas.microsoft.com/office/drawing/2014/main" id="{6F06D79C-D78E-4C9A-C7FB-7D704A6485B9}"/>
+                  </a:ext>
+                </a:extLst>
+              </p:cNvPr>
+              <p:cNvSpPr txBox="1"/>
+              <p:nvPr/>
+            </p:nvSpPr>
+            <p:spPr>
+              <a:xfrm>
+                <a:off x="594538" y="1611907"/>
+                <a:ext cx="10911535" cy="415498"/>
+              </a:xfrm>
+              <a:prstGeom prst="rect">
+                <a:avLst/>
+              </a:prstGeom>
+              <a:noFill/>
+            </p:spPr>
+            <p:txBody>
+              <a:bodyPr wrap="square">
+                <a:spAutoFit/>
+              </a:bodyPr>
+              <a:lstStyle/>
+              <a:p>
+                <a:pPr algn="ctr"/>
+                <a:r>
+                  <a:rPr lang="en-US" sz="2100" b="1" dirty="0" err="1">
+                    <a:solidFill>
+                      <a:srgbClr val="173A5E"/>
+                    </a:solidFill>
+                    <a:latin typeface="Calibri" pitchFamily="34" charset="0"/>
+                    <a:ea typeface="Calibri" pitchFamily="34" charset="-122"/>
+                    <a:cs typeface="Calibri" pitchFamily="34" charset="-120"/>
+                  </a:rPr>
+                  <a:t>Preparazione</a:t>
+                </a:r>
+                <a:r>
+                  <a:rPr lang="en-US" sz="2100" b="1" dirty="0">
+                    <a:solidFill>
+                      <a:srgbClr val="173A5E"/>
+                    </a:solidFill>
+                    <a:latin typeface="Calibri" pitchFamily="34" charset="0"/>
+                    <a:ea typeface="Calibri" pitchFamily="34" charset="-122"/>
+                    <a:cs typeface="Calibri" pitchFamily="34" charset="-120"/>
+                  </a:rPr>
+                  <a:t> </a:t>
+                </a:r>
+                <a:r>
+                  <a:rPr lang="en-US" sz="2100" b="1" dirty="0" err="1">
+                    <a:solidFill>
+                      <a:srgbClr val="173A5E"/>
+                    </a:solidFill>
+                    <a:latin typeface="Calibri" pitchFamily="34" charset="0"/>
+                    <a:ea typeface="Calibri" pitchFamily="34" charset="-122"/>
+                    <a:cs typeface="Calibri" pitchFamily="34" charset="-120"/>
+                  </a:rPr>
+                  <a:t>dello</a:t>
+                </a:r>
+                <a:r>
+                  <a:rPr lang="en-US" sz="2100" b="1" dirty="0">
+                    <a:solidFill>
+                      <a:srgbClr val="173A5E"/>
+                    </a:solidFill>
+                    <a:latin typeface="Calibri" pitchFamily="34" charset="0"/>
+                    <a:ea typeface="Calibri" pitchFamily="34" charset="-122"/>
+                    <a:cs typeface="Calibri" pitchFamily="34" charset="-120"/>
+                  </a:rPr>
+                  <a:t> </a:t>
+                </a:r>
+                <a:r>
+                  <a:rPr lang="en-US" sz="2100" b="1" dirty="0" err="1">
+                    <a:solidFill>
+                      <a:srgbClr val="173A5E"/>
+                    </a:solidFill>
+                    <a:latin typeface="Calibri" pitchFamily="34" charset="0"/>
+                    <a:ea typeface="Calibri" pitchFamily="34" charset="-122"/>
+                    <a:cs typeface="Calibri" pitchFamily="34" charset="-120"/>
+                  </a:rPr>
+                  <a:t>stato</a:t>
+                </a:r>
+                <a:r>
+                  <a:rPr lang="en-US" sz="2100" b="1" dirty="0">
+                    <a:solidFill>
+                      <a:srgbClr val="173A5E"/>
+                    </a:solidFill>
+                    <a:latin typeface="Calibri" pitchFamily="34" charset="0"/>
+                    <a:ea typeface="Calibri" pitchFamily="34" charset="-122"/>
+                    <a:cs typeface="Calibri" pitchFamily="34" charset="-120"/>
+                  </a:rPr>
+                  <a:t> </a:t>
+                </a:r>
+                <a:r>
+                  <a:rPr lang="en-US" sz="2100" b="1" dirty="0" err="1">
+                    <a:solidFill>
+                      <a:srgbClr val="173A5E"/>
+                    </a:solidFill>
+                    <a:latin typeface="Calibri" pitchFamily="34" charset="0"/>
+                    <a:ea typeface="Calibri" pitchFamily="34" charset="-122"/>
+                    <a:cs typeface="Calibri" pitchFamily="34" charset="-120"/>
+                  </a:rPr>
+                  <a:t>parametrizzato</a:t>
+                </a:r>
+                <a14:m>
+                  <m:oMath xmlns:m="http://schemas.openxmlformats.org/officeDocument/2006/math">
+                    <m:r>
+                      <a:rPr lang="en-US" sz="2100" b="1" i="0" dirty="0" smtClean="0">
+                        <a:latin typeface="Cambria Math" panose="02040503050406030204" pitchFamily="18" charset="0"/>
+                      </a:rPr>
+                      <m:t> </m:t>
+                    </m:r>
+                    <m:r>
+                      <a:rPr lang="en-US" sz="2100" i="1" dirty="0" smtClean="0">
+                        <a:latin typeface="Cambria Math" panose="02040503050406030204" pitchFamily="18" charset="0"/>
+                      </a:rPr>
+                      <m:t>|</m:t>
+                    </m:r>
+                    <m:r>
+                      <a:rPr lang="en-US" sz="2100" i="1" dirty="0" smtClean="0">
+                        <a:latin typeface="Cambria Math" panose="02040503050406030204" pitchFamily="18" charset="0"/>
+                      </a:rPr>
+                      <m:t>𝜓</m:t>
+                    </m:r>
+                    <m:d>
+                      <m:dPr>
+                        <m:ctrlPr>
+                          <a:rPr lang="en-US" sz="2100" i="1" dirty="0">
+                            <a:latin typeface="Cambria Math" panose="02040503050406030204" pitchFamily="18" charset="0"/>
+                          </a:rPr>
+                        </m:ctrlPr>
+                      </m:dPr>
+                      <m:e>
+                        <m:r>
+                          <a:rPr lang="en-US" sz="2100" i="1" dirty="0">
+                            <a:latin typeface="Cambria Math" panose="02040503050406030204" pitchFamily="18" charset="0"/>
+                          </a:rPr>
+                          <m:t>𝜃</m:t>
+                        </m:r>
+                      </m:e>
+                    </m:d>
+                    <m:r>
+                      <a:rPr lang="en-US" sz="2100" i="1" dirty="0">
+                        <a:latin typeface="Cambria Math" panose="02040503050406030204" pitchFamily="18" charset="0"/>
+                      </a:rPr>
+                      <m:t>⟩</m:t>
+                    </m:r>
+                  </m:oMath>
+                </a14:m>
+                <a:r>
+                  <a:rPr lang="en-US" sz="2100" dirty="0"/>
+                  <a:t> </a:t>
+                </a:r>
+                <a:r>
+                  <a:rPr lang="en-US" sz="2100" b="1" dirty="0">
+                    <a:solidFill>
+                      <a:srgbClr val="173A5E"/>
+                    </a:solidFill>
+                    <a:latin typeface="Calibri" pitchFamily="34" charset="0"/>
+                    <a:ea typeface="Calibri" pitchFamily="34" charset="-122"/>
+                    <a:cs typeface="Calibri" pitchFamily="34" charset="-120"/>
+                  </a:rPr>
+                  <a:t>- Circuito </a:t>
+                </a:r>
+                <a:r>
+                  <a:rPr lang="en-US" sz="2100" b="1" dirty="0" err="1">
+                    <a:solidFill>
+                      <a:srgbClr val="173A5E"/>
+                    </a:solidFill>
+                    <a:latin typeface="Calibri" pitchFamily="34" charset="0"/>
+                    <a:ea typeface="Calibri" pitchFamily="34" charset="-122"/>
+                    <a:cs typeface="Calibri" pitchFamily="34" charset="-120"/>
+                  </a:rPr>
+                  <a:t>Quantistico</a:t>
+                </a:r>
+                <a:r>
+                  <a:rPr lang="en-US" sz="2100" b="1" dirty="0">
+                    <a:solidFill>
+                      <a:srgbClr val="173A5E"/>
+                    </a:solidFill>
+                    <a:latin typeface="Calibri" pitchFamily="34" charset="0"/>
+                    <a:ea typeface="Calibri" pitchFamily="34" charset="-122"/>
+                    <a:cs typeface="Calibri" pitchFamily="34" charset="-120"/>
+                  </a:rPr>
+                  <a:t> </a:t>
+                </a:r>
+                <a:r>
+                  <a:rPr lang="en-US" sz="2100" b="1" dirty="0" err="1">
+                    <a:solidFill>
+                      <a:srgbClr val="173A5E"/>
+                    </a:solidFill>
+                    <a:latin typeface="Calibri" pitchFamily="34" charset="0"/>
+                    <a:ea typeface="Calibri" pitchFamily="34" charset="-122"/>
+                    <a:cs typeface="Calibri" pitchFamily="34" charset="-120"/>
+                  </a:rPr>
+                  <a:t>Trimero</a:t>
+                </a:r>
+                <a:endParaRPr lang="en-US" dirty="0"/>
+              </a:p>
+            </p:txBody>
+          </p:sp>
+        </mc:Choice>
+        <mc:Fallback>
+          <p:sp>
+            <p:nvSpPr>
+              <p:cNvPr id="7" name="Title Circuito Trimero">
+                <a:extLst>
+                  <a:ext uri="{FF2B5EF4-FFF2-40B4-BE49-F238E27FC236}">
+                    <a16:creationId xmlns:a16="http://schemas.microsoft.com/office/drawing/2014/main" id="{6F06D79C-D78E-4C9A-C7FB-7D704A6485B9}"/>
+                  </a:ext>
+                </a:extLst>
+              </p:cNvPr>
+              <p:cNvSpPr txBox="1">
+                <a:spLocks noRot="1" noChangeAspect="1" noMove="1" noResize="1" noEditPoints="1" noAdjustHandles="1" noChangeArrowheads="1" noChangeShapeType="1" noTextEdit="1"/>
+              </p:cNvSpPr>
+              <p:nvPr/>
+            </p:nvSpPr>
+            <p:spPr>
+              <a:xfrm>
+                <a:off x="594538" y="1611907"/>
+                <a:ext cx="10911535" cy="415498"/>
+              </a:xfrm>
+              <a:prstGeom prst="rect">
+                <a:avLst/>
+              </a:prstGeom>
+              <a:blipFill>
+                <a:blip r:embed="rId16"/>
+                <a:stretch>
+                  <a:fillRect t="-8696" b="-27536"/>
+                </a:stretch>
+              </a:blipFill>
+            </p:spPr>
+            <p:txBody>
+              <a:bodyPr/>
+              <a:lstStyle/>
+              <a:p>
+                <a:r>
+                  <a:rPr lang="en-US">
+                    <a:noFill/>
+                  </a:rPr>
+                  <a:t> </a:t>
+                </a:r>
+              </a:p>
+            </p:txBody>
+          </p:sp>
+        </mc:Fallback>
+      </mc:AlternateContent>
+      <mc:AlternateContent xmlns:mc="http://schemas.openxmlformats.org/markup-compatibility/2006">
+        <mc:Choice xmlns:a14="http://schemas.microsoft.com/office/drawing/2010/main" Requires="a14">
+          <p:sp>
+            <p:nvSpPr>
+              <p:cNvPr id="8" name="Testo preparazione trimero">
+                <a:extLst>
+                  <a:ext uri="{FF2B5EF4-FFF2-40B4-BE49-F238E27FC236}">
+                    <a16:creationId xmlns:a16="http://schemas.microsoft.com/office/drawing/2014/main" id="{505067FF-8756-102D-C3C1-5E6B2B24EAA0}"/>
+                  </a:ext>
+                </a:extLst>
+              </p:cNvPr>
+              <p:cNvSpPr txBox="1"/>
+              <p:nvPr/>
+            </p:nvSpPr>
+            <p:spPr>
+              <a:xfrm>
+                <a:off x="640080" y="2518013"/>
+                <a:ext cx="10911535" cy="553998"/>
+              </a:xfrm>
+              <a:prstGeom prst="rect">
+                <a:avLst/>
+              </a:prstGeom>
+              <a:noFill/>
+            </p:spPr>
+            <p:txBody>
+              <a:bodyPr wrap="square" rtlCol="0">
+                <a:spAutoFit/>
+              </a:bodyPr>
+              <a:lstStyle/>
+              <a:p>
+                <a:pPr algn="ctr"/>
+                <a:r>
+                  <a:rPr lang="en-US" sz="1500" dirty="0"/>
+                  <a:t>Due </a:t>
+                </a:r>
+                <a:r>
+                  <a:rPr lang="en-US" sz="1500" dirty="0" err="1"/>
+                  <a:t>circuiti</a:t>
+                </a:r>
+                <a:r>
+                  <a:rPr lang="en-US" sz="1500" dirty="0"/>
+                  <a:t> </a:t>
+                </a:r>
+                <a14:m>
+                  <m:oMath xmlns:m="http://schemas.openxmlformats.org/officeDocument/2006/math">
+                    <m:r>
+                      <a:rPr lang="en-US" sz="1500" i="1" dirty="0" smtClean="0">
+                        <a:latin typeface="Cambria Math" panose="02040503050406030204" pitchFamily="18" charset="0"/>
+                      </a:rPr>
+                      <m:t>𝑈</m:t>
+                    </m:r>
+                    <m:d>
+                      <m:dPr>
+                        <m:ctrlPr>
+                          <a:rPr lang="en-US" sz="1500" i="1" dirty="0">
+                            <a:latin typeface="Cambria Math" panose="02040503050406030204" pitchFamily="18" charset="0"/>
+                          </a:rPr>
+                        </m:ctrlPr>
+                      </m:dPr>
+                      <m:e>
+                        <m:r>
+                          <a:rPr lang="en-US" sz="1500" i="1" dirty="0">
+                            <a:latin typeface="Cambria Math" panose="02040503050406030204" pitchFamily="18" charset="0"/>
+                          </a:rPr>
+                          <m:t>𝜃</m:t>
+                        </m:r>
+                      </m:e>
+                    </m:d>
+                  </m:oMath>
+                </a14:m>
+                <a:r>
+                  <a:rPr lang="en-US" sz="1500" dirty="0"/>
+                  <a:t>, </a:t>
+                </a:r>
+                <a:r>
+                  <a:rPr lang="en-US" sz="1500" dirty="0" err="1"/>
+                  <a:t>che</a:t>
+                </a:r>
+                <a:r>
+                  <a:rPr lang="en-US" sz="1500" dirty="0"/>
+                  <a:t> a </a:t>
+                </a:r>
+                <a:r>
+                  <a:rPr lang="en-US" sz="1500" dirty="0" err="1"/>
+                  <a:t>partire</a:t>
+                </a:r>
+                <a:r>
+                  <a:rPr lang="en-US" sz="1500" dirty="0"/>
+                  <a:t> da </a:t>
+                </a:r>
+                <a14:m>
+                  <m:oMath xmlns:m="http://schemas.openxmlformats.org/officeDocument/2006/math">
+                    <m:r>
+                      <a:rPr lang="en-US" sz="1500" dirty="0" smtClean="0">
+                        <a:latin typeface="Cambria Math" panose="02040503050406030204" pitchFamily="18" charset="0"/>
+                      </a:rPr>
+                      <m:t>|</m:t>
+                    </m:r>
+                    <m:r>
+                      <a:rPr lang="en-US" sz="1500" i="0" dirty="0">
+                        <a:latin typeface="Cambria Math" panose="02040503050406030204" pitchFamily="18" charset="0"/>
+                      </a:rPr>
+                      <m:t>00</m:t>
+                    </m:r>
+                    <m:r>
+                      <a:rPr lang="en-US" sz="1500" b="0" i="0" dirty="0" smtClean="0">
+                        <a:latin typeface="Cambria Math" panose="02040503050406030204" pitchFamily="18" charset="0"/>
+                      </a:rPr>
+                      <m:t>0</m:t>
+                    </m:r>
+                    <m:r>
+                      <a:rPr lang="en-US" sz="1500" i="0" dirty="0">
+                        <a:latin typeface="Cambria Math" panose="02040503050406030204" pitchFamily="18" charset="0"/>
+                      </a:rPr>
+                      <m:t>⟩</m:t>
+                    </m:r>
+                  </m:oMath>
+                </a14:m>
+                <a:r>
+                  <a:rPr lang="en-US" sz="1500" dirty="0"/>
+                  <a:t> </a:t>
+                </a:r>
+                <a:r>
+                  <a:rPr lang="en-US" sz="1500" dirty="0" err="1"/>
+                  <a:t>preparano</a:t>
+                </a:r>
+                <a:r>
+                  <a:rPr lang="en-US" sz="1500" dirty="0"/>
+                  <a:t> </a:t>
+                </a:r>
+                <a14:m>
+                  <m:oMath xmlns:m="http://schemas.openxmlformats.org/officeDocument/2006/math">
+                    <m:d>
+                      <m:dPr>
+                        <m:begChr m:val="|"/>
+                        <m:endChr m:val="|"/>
+                        <m:ctrlPr>
+                          <a:rPr lang="en-US" sz="1500" i="1" dirty="0">
+                            <a:latin typeface="Cambria Math" panose="02040503050406030204" pitchFamily="18" charset="0"/>
+                          </a:rPr>
+                        </m:ctrlPr>
+                      </m:dPr>
+                      <m:e>
+                        <m:r>
+                          <a:rPr lang="en-US" sz="1500" i="1" dirty="0">
+                            <a:latin typeface="Cambria Math" panose="02040503050406030204" pitchFamily="18" charset="0"/>
+                          </a:rPr>
+                          <m:t>𝜓</m:t>
+                        </m:r>
+                        <m:d>
+                          <m:dPr>
+                            <m:ctrlPr>
+                              <a:rPr lang="en-US" sz="1500" i="1" dirty="0">
+                                <a:latin typeface="Cambria Math" panose="02040503050406030204" pitchFamily="18" charset="0"/>
+                              </a:rPr>
+                            </m:ctrlPr>
+                          </m:dPr>
+                          <m:e>
+                            <m:r>
+                              <a:rPr lang="en-US" sz="1500" i="1" dirty="0">
+                                <a:latin typeface="Cambria Math" panose="02040503050406030204" pitchFamily="18" charset="0"/>
+                              </a:rPr>
+                              <m:t>𝜃</m:t>
+                            </m:r>
+                          </m:e>
+                        </m:d>
+                        <m:r>
+                          <a:rPr lang="en-US" sz="1500" i="0" dirty="0">
+                            <a:latin typeface="Cambria Math" panose="02040503050406030204" pitchFamily="18" charset="0"/>
+                          </a:rPr>
+                          <m:t>⟩=</m:t>
+                        </m:r>
+                        <m:r>
+                          <a:rPr lang="en-US" sz="1500" i="1" dirty="0">
+                            <a:latin typeface="Cambria Math" panose="02040503050406030204" pitchFamily="18" charset="0"/>
+                          </a:rPr>
+                          <m:t>𝑈</m:t>
+                        </m:r>
+                        <m:d>
+                          <m:dPr>
+                            <m:ctrlPr>
+                              <a:rPr lang="en-US" sz="1500" i="1" dirty="0">
+                                <a:latin typeface="Cambria Math" panose="02040503050406030204" pitchFamily="18" charset="0"/>
+                              </a:rPr>
+                            </m:ctrlPr>
+                          </m:dPr>
+                          <m:e>
+                            <m:r>
+                              <a:rPr lang="en-US" sz="1500" i="1" dirty="0">
+                                <a:latin typeface="Cambria Math" panose="02040503050406030204" pitchFamily="18" charset="0"/>
+                              </a:rPr>
+                              <m:t>𝜃</m:t>
+                            </m:r>
+                          </m:e>
+                        </m:d>
+                      </m:e>
+                    </m:d>
+                    <m:r>
+                      <a:rPr lang="en-US" sz="1500" i="0" dirty="0">
+                        <a:latin typeface="Cambria Math" panose="02040503050406030204" pitchFamily="18" charset="0"/>
+                      </a:rPr>
+                      <m:t>00</m:t>
+                    </m:r>
+                    <m:r>
+                      <a:rPr lang="en-US" sz="1500" b="0" i="0" dirty="0" smtClean="0">
+                        <a:latin typeface="Cambria Math" panose="02040503050406030204" pitchFamily="18" charset="0"/>
+                      </a:rPr>
+                      <m:t>0</m:t>
+                    </m:r>
+                    <m:r>
+                      <a:rPr lang="en-US" sz="1500" i="0" dirty="0">
+                        <a:latin typeface="Cambria Math" panose="02040503050406030204" pitchFamily="18" charset="0"/>
+                      </a:rPr>
+                      <m:t>⟩</m:t>
+                    </m:r>
+                  </m:oMath>
+                </a14:m>
+                <a:r>
+                  <a:rPr lang="en-US" sz="1500" dirty="0"/>
+                  <a:t>, </a:t>
+                </a:r>
+                <a:r>
+                  <a:rPr lang="en-US" sz="1500" dirty="0" err="1"/>
+                  <a:t>confrontati</a:t>
+                </a:r>
+                <a:r>
+                  <a:rPr lang="en-US" sz="1500" dirty="0"/>
+                  <a:t> </a:t>
+                </a:r>
+                <a:r>
+                  <a:rPr lang="en-US" sz="1500" dirty="0" err="1"/>
+                  <a:t>sulla</a:t>
+                </a:r>
+                <a:r>
+                  <a:rPr lang="en-US" sz="1500" dirty="0"/>
+                  <a:t> </a:t>
+                </a:r>
+                <a:r>
+                  <a:rPr lang="en-US" sz="1500" dirty="0" err="1"/>
+                  <a:t>fedeltà</a:t>
+                </a:r>
+                <a:r>
+                  <a:rPr lang="en-US" sz="1500" dirty="0"/>
+                  <a:t> </a:t>
+                </a:r>
+                <a14:m>
+                  <m:oMath xmlns:m="http://schemas.openxmlformats.org/officeDocument/2006/math">
+                    <m:r>
+                      <a:rPr lang="en-US" sz="1500" i="1" dirty="0" smtClean="0">
+                        <a:latin typeface="Cambria Math" panose="02040503050406030204" pitchFamily="18" charset="0"/>
+                      </a:rPr>
+                      <m:t>𝐹</m:t>
+                    </m:r>
+                    <m:r>
+                      <a:rPr lang="en-US" sz="1500" i="0" dirty="0">
+                        <a:latin typeface="Cambria Math" panose="02040503050406030204" pitchFamily="18" charset="0"/>
+                      </a:rPr>
+                      <m:t>=</m:t>
+                    </m:r>
+                    <m:d>
+                      <m:dPr>
+                        <m:begChr m:val="|"/>
+                        <m:endChr m:val="|"/>
+                        <m:ctrlPr>
+                          <a:rPr lang="en-US" sz="1500" i="0" dirty="0">
+                            <a:latin typeface="Cambria Math" panose="02040503050406030204" pitchFamily="18" charset="0"/>
+                          </a:rPr>
+                        </m:ctrlPr>
+                      </m:dPr>
+                      <m:e>
+                        <m:r>
+                          <a:rPr lang="en-US" sz="1500" i="0" dirty="0">
+                            <a:latin typeface="Cambria Math" panose="02040503050406030204" pitchFamily="18" charset="0"/>
+                          </a:rPr>
+                          <m:t>⟨</m:t>
+                        </m:r>
+                        <m:r>
+                          <a:rPr lang="en-US" sz="1500" i="1" dirty="0">
+                            <a:latin typeface="Cambria Math" panose="02040503050406030204" pitchFamily="18" charset="0"/>
+                          </a:rPr>
+                          <m:t>𝜓</m:t>
+                        </m:r>
+                        <m:d>
+                          <m:dPr>
+                            <m:ctrlPr>
+                              <a:rPr lang="en-US" sz="1500" i="1" dirty="0">
+                                <a:latin typeface="Cambria Math" panose="02040503050406030204" pitchFamily="18" charset="0"/>
+                              </a:rPr>
+                            </m:ctrlPr>
+                          </m:dPr>
+                          <m:e>
+                            <m:r>
+                              <a:rPr lang="en-US" sz="1500" i="1" dirty="0">
+                                <a:latin typeface="Cambria Math" panose="02040503050406030204" pitchFamily="18" charset="0"/>
+                              </a:rPr>
+                              <m:t>𝜃</m:t>
+                            </m:r>
+                          </m:e>
+                        </m:d>
+                      </m:e>
+                    </m:d>
+                    <m:r>
+                      <a:rPr lang="en-US" sz="1500" i="1" dirty="0">
+                        <a:latin typeface="Cambria Math" panose="02040503050406030204" pitchFamily="18" charset="0"/>
+                      </a:rPr>
+                      <m:t>𝜓</m:t>
+                    </m:r>
+                    <m:r>
+                      <a:rPr lang="en-US" sz="1500" i="0" dirty="0">
+                        <a:latin typeface="Cambria Math" panose="02040503050406030204" pitchFamily="18" charset="0"/>
+                      </a:rPr>
+                      <m:t>₀⟩|²</m:t>
+                    </m:r>
+                  </m:oMath>
+                </a14:m>
+                <a:r>
+                  <a:rPr lang="en-US" sz="1500" dirty="0"/>
+                  <a:t> rispetto </a:t>
+                </a:r>
+                <a:r>
+                  <a:rPr lang="en-US" sz="1500" dirty="0" err="1"/>
+                  <a:t>allo</a:t>
+                </a:r>
+                <a:r>
+                  <a:rPr lang="en-US" sz="1500" dirty="0"/>
+                  <a:t> </a:t>
+                </a:r>
+                <a:r>
+                  <a:rPr lang="en-US" sz="1500" dirty="0" err="1"/>
+                  <a:t>stato</a:t>
+                </a:r>
+                <a:r>
+                  <a:rPr lang="en-US" sz="1500" dirty="0"/>
+                  <a:t> </a:t>
+                </a:r>
+                <a:r>
+                  <a:rPr lang="en-US" sz="1500" dirty="0" err="1"/>
+                  <a:t>fondamentale</a:t>
+                </a:r>
+                <a:r>
+                  <a:rPr lang="en-US" sz="1500" dirty="0"/>
+                  <a:t> </a:t>
+                </a:r>
+                <a:r>
+                  <a:rPr lang="en-US" sz="1500" dirty="0" err="1"/>
+                  <a:t>vero</a:t>
+                </a:r>
+                <a:endParaRPr lang="en-US" sz="1500" dirty="0"/>
+              </a:p>
+            </p:txBody>
+          </p:sp>
+        </mc:Choice>
+        <mc:Fallback>
+          <p:sp>
+            <p:nvSpPr>
+              <p:cNvPr id="8" name="Testo preparazione trimero">
+                <a:extLst>
+                  <a:ext uri="{FF2B5EF4-FFF2-40B4-BE49-F238E27FC236}">
+                    <a16:creationId xmlns:a16="http://schemas.microsoft.com/office/drawing/2014/main" id="{505067FF-8756-102D-C3C1-5E6B2B24EAA0}"/>
+                  </a:ext>
+                </a:extLst>
+              </p:cNvPr>
+              <p:cNvSpPr txBox="1">
+                <a:spLocks noRot="1" noChangeAspect="1" noMove="1" noResize="1" noEditPoints="1" noAdjustHandles="1" noChangeArrowheads="1" noChangeShapeType="1" noTextEdit="1"/>
+              </p:cNvSpPr>
+              <p:nvPr/>
+            </p:nvSpPr>
+            <p:spPr>
+              <a:xfrm>
+                <a:off x="640080" y="2518013"/>
+                <a:ext cx="10911535" cy="553998"/>
+              </a:xfrm>
+              <a:prstGeom prst="rect">
+                <a:avLst/>
+              </a:prstGeom>
+              <a:blipFill>
                 <a:blip r:embed="rId17"/>
                 <a:stretch>
                   <a:fillRect t="-2198" b="-12088"/>
@@ -3905,6 +4171,823 @@
           </p:sp>
         </mc:Fallback>
       </mc:AlternateContent>
+      <p:pic>
+        <p:nvPicPr>
+          <p:cNvPr id="10" name="Circuito W-2q.6 trimero">
+            <a:extLst>
+              <a:ext uri="{FF2B5EF4-FFF2-40B4-BE49-F238E27FC236}">
+                <a16:creationId xmlns:a16="http://schemas.microsoft.com/office/drawing/2014/main" id="{F7B5B225-88A3-5B3C-1336-0AA3661D6882}"/>
+              </a:ext>
+            </a:extLst>
+          </p:cNvPr>
+          <p:cNvPicPr>
+            <a:picLocks noChangeAspect="1"/>
+          </p:cNvPicPr>
+          <p:nvPr/>
+        </p:nvPicPr>
+        <p:blipFill>
+          <a:blip r:embed="rId18"/>
+          <a:stretch>
+            <a:fillRect/>
+          </a:stretch>
+        </p:blipFill>
+        <p:spPr>
+          <a:xfrm>
+            <a:off x="5965173" y="3171405"/>
+            <a:ext cx="5571825" cy="2100478"/>
+          </a:xfrm>
+          <a:prstGeom prst="rect">
+            <a:avLst/>
+          </a:prstGeom>
+        </p:spPr>
+      </p:pic>
+      <p:pic>
+        <p:nvPicPr>
+          <p:cNvPr id="12" name="Circuito RBS-2q.6 trimero">
+            <a:extLst>
+              <a:ext uri="{FF2B5EF4-FFF2-40B4-BE49-F238E27FC236}">
+                <a16:creationId xmlns:a16="http://schemas.microsoft.com/office/drawing/2014/main" id="{5ED0C11D-CCC9-E8F0-7A2F-87A8DE0AE6B5}"/>
+              </a:ext>
+            </a:extLst>
+          </p:cNvPr>
+          <p:cNvPicPr>
+            <a:picLocks noChangeAspect="1"/>
+          </p:cNvPicPr>
+          <p:nvPr/>
+        </p:nvPicPr>
+        <p:blipFill>
+          <a:blip r:embed="rId19"/>
+          <a:stretch>
+            <a:fillRect/>
+          </a:stretch>
+        </p:blipFill>
+        <p:spPr>
+          <a:xfrm>
+            <a:off x="594538" y="3213350"/>
+            <a:ext cx="5349299" cy="2016589"/>
+          </a:xfrm>
+          <a:prstGeom prst="rect">
+            <a:avLst/>
+          </a:prstGeom>
+        </p:spPr>
+      </p:pic>
+      <mc:AlternateContent xmlns:mc="http://schemas.openxmlformats.org/markup-compatibility/2006">
+        <mc:Choice xmlns:a14="http://schemas.microsoft.com/office/drawing/2010/main" Requires="a14">
+          <p:sp>
+            <p:nvSpPr>
+              <p:cNvPr id="15" name="Nota PMA esteso trimero">
+                <a:extLst>
+                  <a:ext uri="{FF2B5EF4-FFF2-40B4-BE49-F238E27FC236}">
+                    <a16:creationId xmlns:a16="http://schemas.microsoft.com/office/drawing/2014/main" id="{D2943A68-9707-5CF2-981F-EBC027B2CA3D}"/>
+                  </a:ext>
+                </a:extLst>
+              </p:cNvPr>
+              <p:cNvSpPr txBox="1"/>
+              <p:nvPr/>
+            </p:nvSpPr>
+            <p:spPr>
+              <a:xfrm>
+                <a:off x="787968" y="5689801"/>
+                <a:ext cx="4818888" cy="1077218"/>
+              </a:xfrm>
+              <a:prstGeom prst="rect">
+                <a:avLst/>
+              </a:prstGeom>
+              <a:noFill/>
+            </p:spPr>
+            <p:txBody>
+              <a:bodyPr wrap="square" rtlCol="0">
+                <a:spAutoFit/>
+              </a:bodyPr>
+              <a:lstStyle/>
+              <a:p>
+                <a:r>
+                  <a:rPr lang="en-US" sz="1600" b="1" dirty="0">
+                    <a:solidFill>
+                      <a:srgbClr val="16233A"/>
+                    </a:solidFill>
+                    <a:latin typeface="Calibri" pitchFamily="34" charset="0"/>
+                    <a:ea typeface="Calibri" pitchFamily="34" charset="-122"/>
+                    <a:cs typeface="Calibri" pitchFamily="34" charset="-120"/>
+                  </a:rPr>
+                  <a:t>RBS-2q.6 (PMA </a:t>
+                </a:r>
+                <a:r>
+                  <a:rPr lang="en-US" sz="1600" b="1" dirty="0" err="1">
+                    <a:solidFill>
+                      <a:srgbClr val="16233A"/>
+                    </a:solidFill>
+                    <a:latin typeface="Calibri" pitchFamily="34" charset="0"/>
+                    <a:ea typeface="Calibri" pitchFamily="34" charset="-122"/>
+                    <a:cs typeface="Calibri" pitchFamily="34" charset="-120"/>
+                  </a:rPr>
+                  <a:t>esteso</a:t>
+                </a:r>
+                <a:r>
+                  <a:rPr lang="en-US" sz="1600" b="1" dirty="0">
+                    <a:solidFill>
+                      <a:srgbClr val="16233A"/>
+                    </a:solidFill>
+                    <a:latin typeface="Calibri" pitchFamily="34" charset="0"/>
+                    <a:ea typeface="Calibri" pitchFamily="34" charset="-122"/>
+                    <a:cs typeface="Calibri" pitchFamily="34" charset="-120"/>
+                  </a:rPr>
+                  <a:t> - </a:t>
+                </a:r>
+                <a:r>
+                  <a:rPr lang="en-US" sz="1600" b="1" dirty="0" err="1">
+                    <a:solidFill>
+                      <a:srgbClr val="16233A"/>
+                    </a:solidFill>
+                    <a:latin typeface="Calibri" pitchFamily="34" charset="0"/>
+                    <a:ea typeface="Calibri" pitchFamily="34" charset="-122"/>
+                    <a:cs typeface="Calibri" pitchFamily="34" charset="-120"/>
+                  </a:rPr>
+                  <a:t>trimero</a:t>
+                </a:r>
+                <a:r>
+                  <a:rPr lang="en-US" sz="1600" b="1" dirty="0">
+                    <a:solidFill>
+                      <a:srgbClr val="16233A"/>
+                    </a:solidFill>
+                    <a:latin typeface="Calibri" pitchFamily="34" charset="0"/>
+                    <a:ea typeface="Calibri" pitchFamily="34" charset="-122"/>
+                    <a:cs typeface="Calibri" pitchFamily="34" charset="-120"/>
+                  </a:rPr>
+                  <a:t>)</a:t>
+                </a:r>
+                <a:r>
+                  <a:rPr lang="en-US" sz="1600" b="1" dirty="0"/>
+                  <a:t>: </a:t>
+                </a:r>
+                <a:r>
+                  <a:rPr lang="en-US" sz="1600" dirty="0"/>
+                  <a:t>RBS + </a:t>
+                </a:r>
+                <a:r>
+                  <a:rPr lang="en-US" sz="1600" dirty="0" err="1"/>
+                  <a:t>tre</a:t>
+                </a:r>
+                <a:r>
+                  <a:rPr lang="en-US" sz="1600" dirty="0"/>
+                  <a:t> </a:t>
+                </a:r>
+                <a:r>
+                  <a:rPr lang="en-US" sz="1600" dirty="0" err="1"/>
+                  <a:t>rotazioni</a:t>
+                </a:r>
+                <a:r>
+                  <a:rPr lang="en-US" sz="1600" dirty="0"/>
+                  <a:t> </a:t>
+                </a:r>
+                <a:r>
+                  <a:rPr lang="en-US" sz="1600" dirty="0" err="1"/>
+                  <a:t>indipendenti</a:t>
+                </a:r>
+                <a:r>
+                  <a:rPr lang="en-US" sz="1600" dirty="0"/>
+                  <a:t> sui </a:t>
+                </a:r>
+                <a:r>
+                  <a:rPr lang="en-US" sz="1600" dirty="0" err="1"/>
+                  <a:t>tre</a:t>
+                </a:r>
+                <a:r>
+                  <a:rPr lang="en-US" sz="1600" dirty="0"/>
+                  <a:t> </a:t>
+                </a:r>
+                <a:r>
+                  <a:rPr lang="en-US" sz="1600" dirty="0" err="1"/>
+                  <a:t>legami</a:t>
+                </a:r>
+                <a:r>
+                  <a:rPr lang="en-US" sz="1600" dirty="0"/>
+                  <a:t> del </a:t>
+                </a:r>
+                <a:r>
+                  <a:rPr lang="en-US" sz="1600" dirty="0" err="1"/>
+                  <a:t>triangolo</a:t>
+                </a:r>
+                <a:r>
+                  <a:rPr lang="en-US" sz="1600" dirty="0"/>
+                  <a:t> - </a:t>
+                </a:r>
+                <a:r>
+                  <a:rPr lang="en-US" sz="1600" dirty="0" err="1"/>
+                  <a:t>stessa</a:t>
+                </a:r>
+                <a:r>
+                  <a:rPr lang="en-US" sz="1600" dirty="0"/>
+                  <a:t> idea del </a:t>
+                </a:r>
+                <a:r>
+                  <a:rPr lang="en-US" sz="1600" dirty="0" err="1"/>
+                  <a:t>dimero</a:t>
+                </a:r>
+                <a:r>
+                  <a:rPr lang="en-US" sz="1600" dirty="0"/>
+                  <a:t>, </a:t>
+                </a:r>
+                <a:r>
+                  <a:rPr lang="en-US" sz="1600" dirty="0" err="1"/>
+                  <a:t>estesa</a:t>
+                </a:r>
+                <a:r>
+                  <a:rPr lang="en-US" sz="1600" dirty="0"/>
+                  <a:t> a </a:t>
+                </a:r>
+                <a:r>
+                  <a:rPr lang="en-US" sz="1600" dirty="0" err="1"/>
+                  <a:t>tre</a:t>
+                </a:r>
+                <a:r>
+                  <a:rPr lang="en-US" sz="1600" dirty="0"/>
+                  <a:t> spin: </a:t>
+                </a:r>
+                <a14:m>
+                  <m:oMath xmlns:m="http://schemas.openxmlformats.org/officeDocument/2006/math">
+                    <m:r>
+                      <a:rPr lang="en-US" sz="1600"/>
+                      <m:t>ℱ</m:t>
+                    </m:r>
+                    <m:r>
+                      <a:rPr lang="en-US" sz="1600"/>
+                      <m:t>=0.9999110739</m:t>
+                    </m:r>
+                  </m:oMath>
+                </a14:m>
+                <a:r>
+                  <a:rPr lang="en-US" sz="1600" dirty="0"/>
+                  <a:t>, non </a:t>
+                </a:r>
+                <a:r>
+                  <a:rPr lang="en-US" sz="1600" dirty="0" err="1"/>
+                  <a:t>arriva</a:t>
+                </a:r>
+                <a:r>
+                  <a:rPr lang="en-US" sz="1600" dirty="0"/>
+                  <a:t> </a:t>
+                </a:r>
+                <a:r>
+                  <a:rPr lang="en-US" sz="1600" dirty="0" err="1"/>
+                  <a:t>mai</a:t>
+                </a:r>
+                <a:r>
+                  <a:rPr lang="en-US" sz="1600" dirty="0"/>
+                  <a:t> a </a:t>
+                </a:r>
+                <a14:m>
+                  <m:oMath xmlns:m="http://schemas.openxmlformats.org/officeDocument/2006/math">
+                    <m:r>
+                      <a:rPr lang="en-US" sz="1600"/>
+                      <m:t>1</m:t>
+                    </m:r>
+                  </m:oMath>
+                </a14:m>
+                <a:r>
+                  <a:rPr lang="en-US" sz="1600" dirty="0"/>
+                  <a:t> - un </a:t>
+                </a:r>
+                <a:r>
+                  <a:rPr lang="en-US" sz="1600" dirty="0" err="1"/>
+                  <a:t>tetto</a:t>
+                </a:r>
+                <a:r>
+                  <a:rPr lang="en-US" sz="1600" dirty="0"/>
+                  <a:t> </a:t>
+                </a:r>
+                <a:r>
+                  <a:rPr lang="en-US" sz="1600" dirty="0" err="1"/>
+                  <a:t>strutturale</a:t>
+                </a:r>
+                <a:r>
+                  <a:rPr lang="en-US" sz="1600" dirty="0"/>
+                  <a:t> </a:t>
+                </a:r>
+                <a:r>
+                  <a:rPr lang="en-US" sz="1600" dirty="0" err="1"/>
+                  <a:t>residuo</a:t>
+                </a:r>
+                <a:endParaRPr lang="en-US" sz="1600" dirty="0"/>
+              </a:p>
+            </p:txBody>
+          </p:sp>
+        </mc:Choice>
+        <mc:Fallback>
+          <p:sp>
+            <p:nvSpPr>
+              <p:cNvPr id="15" name="Nota PMA esteso trimero">
+                <a:extLst>
+                  <a:ext uri="{FF2B5EF4-FFF2-40B4-BE49-F238E27FC236}">
+                    <a16:creationId xmlns:a16="http://schemas.microsoft.com/office/drawing/2014/main" id="{D2943A68-9707-5CF2-981F-EBC027B2CA3D}"/>
+                  </a:ext>
+                </a:extLst>
+              </p:cNvPr>
+              <p:cNvSpPr txBox="1">
+                <a:spLocks noRot="1" noChangeAspect="1" noMove="1" noResize="1" noEditPoints="1" noAdjustHandles="1" noChangeArrowheads="1" noChangeShapeType="1" noTextEdit="1"/>
+              </p:cNvSpPr>
+              <p:nvPr/>
+            </p:nvSpPr>
+            <p:spPr>
+              <a:xfrm>
+                <a:off x="787968" y="5689801"/>
+                <a:ext cx="4818888" cy="1077218"/>
+              </a:xfrm>
+              <a:prstGeom prst="rect">
+                <a:avLst/>
+              </a:prstGeom>
+              <a:blipFill>
+                <a:blip r:embed="rId20"/>
+                <a:stretch>
+                  <a:fillRect l="-632" t="-1695" b="-6215"/>
+                </a:stretch>
+              </a:blipFill>
+            </p:spPr>
+            <p:txBody>
+              <a:bodyPr/>
+              <a:lstStyle/>
+              <a:p>
+                <a:r>
+                  <a:rPr lang="en-US">
+                    <a:noFill/>
+                  </a:rPr>
+                  <a:t> </a:t>
+                </a:r>
+              </a:p>
+            </p:txBody>
+          </p:sp>
+        </mc:Fallback>
+      </mc:AlternateContent>
+      <mc:AlternateContent xmlns:mc="http://schemas.openxmlformats.org/markup-compatibility/2006">
+        <mc:Choice xmlns:a14="http://schemas.microsoft.com/office/drawing/2010/main" Requires="a14">
+          <p:sp>
+            <p:nvSpPr>
+              <p:cNvPr id="17" name="Nota PMA esteso trmero">
+                <a:extLst>
+                  <a:ext uri="{FF2B5EF4-FFF2-40B4-BE49-F238E27FC236}">
+                    <a16:creationId xmlns:a16="http://schemas.microsoft.com/office/drawing/2014/main" id="{FCC1EC33-E840-6462-6166-E66176B5B039}"/>
+                  </a:ext>
+                </a:extLst>
+              </p:cNvPr>
+              <p:cNvSpPr txBox="1"/>
+              <p:nvPr/>
+            </p:nvSpPr>
+            <p:spPr>
+              <a:xfrm>
+                <a:off x="6341641" y="5689801"/>
+                <a:ext cx="4818888" cy="609206"/>
+              </a:xfrm>
+              <a:prstGeom prst="rect">
+                <a:avLst/>
+              </a:prstGeom>
+              <a:noFill/>
+            </p:spPr>
+            <p:txBody>
+              <a:bodyPr wrap="square" rtlCol="0">
+                <a:spAutoFit/>
+              </a:bodyPr>
+              <a:lstStyle/>
+              <a:p>
+                <a:r>
+                  <a:rPr lang="en-US" sz="1600" b="1" dirty="0">
+                    <a:solidFill>
+                      <a:srgbClr val="16233A"/>
+                    </a:solidFill>
+                    <a:latin typeface="Calibri" pitchFamily="34" charset="0"/>
+                    <a:ea typeface="Calibri" pitchFamily="34" charset="-122"/>
+                    <a:cs typeface="Calibri" pitchFamily="34" charset="-120"/>
+                  </a:rPr>
+                  <a:t>W-2q.6 (</a:t>
+                </a:r>
+                <a:r>
+                  <a:rPr lang="en-US" sz="1600" b="1" dirty="0" err="1">
+                    <a:solidFill>
+                      <a:srgbClr val="16233A"/>
+                    </a:solidFill>
+                    <a:latin typeface="Calibri" pitchFamily="34" charset="0"/>
+                    <a:ea typeface="Calibri" pitchFamily="34" charset="-122"/>
+                    <a:cs typeface="Calibri" pitchFamily="34" charset="-120"/>
+                  </a:rPr>
+                  <a:t>circuito</a:t>
+                </a:r>
+                <a:r>
+                  <a:rPr lang="en-US" sz="1600" b="1" dirty="0">
+                    <a:solidFill>
+                      <a:srgbClr val="16233A"/>
+                    </a:solidFill>
+                    <a:latin typeface="Calibri" pitchFamily="34" charset="0"/>
+                    <a:ea typeface="Calibri" pitchFamily="34" charset="-122"/>
+                    <a:cs typeface="Calibri" pitchFamily="34" charset="-120"/>
+                  </a:rPr>
+                  <a:t> </a:t>
+                </a:r>
+                <a:r>
+                  <a:rPr lang="en-US" sz="1600" b="1" dirty="0" err="1">
+                    <a:solidFill>
+                      <a:srgbClr val="16233A"/>
+                    </a:solidFill>
+                    <a:latin typeface="Calibri" pitchFamily="34" charset="0"/>
+                    <a:ea typeface="Calibri" pitchFamily="34" charset="-122"/>
+                    <a:cs typeface="Calibri" pitchFamily="34" charset="-120"/>
+                  </a:rPr>
+                  <a:t>scelto</a:t>
+                </a:r>
+                <a:r>
+                  <a:rPr lang="en-US" sz="1600" b="1" dirty="0">
+                    <a:solidFill>
+                      <a:srgbClr val="16233A"/>
+                    </a:solidFill>
+                    <a:latin typeface="Calibri" pitchFamily="34" charset="0"/>
+                    <a:ea typeface="Calibri" pitchFamily="34" charset="-122"/>
+                    <a:cs typeface="Calibri" pitchFamily="34" charset="-120"/>
+                  </a:rPr>
+                  <a:t> - </a:t>
+                </a:r>
+                <a:r>
+                  <a:rPr lang="en-US" sz="1600" b="1" dirty="0" err="1">
+                    <a:solidFill>
+                      <a:srgbClr val="16233A"/>
+                    </a:solidFill>
+                    <a:latin typeface="Calibri" pitchFamily="34" charset="0"/>
+                    <a:ea typeface="Calibri" pitchFamily="34" charset="-122"/>
+                    <a:cs typeface="Calibri" pitchFamily="34" charset="-120"/>
+                  </a:rPr>
+                  <a:t>trimero</a:t>
+                </a:r>
+                <a:r>
+                  <a:rPr lang="en-US" sz="1600" b="1" dirty="0">
+                    <a:solidFill>
+                      <a:srgbClr val="16233A"/>
+                    </a:solidFill>
+                    <a:latin typeface="Calibri" pitchFamily="34" charset="0"/>
+                    <a:ea typeface="Calibri" pitchFamily="34" charset="-122"/>
+                    <a:cs typeface="Calibri" pitchFamily="34" charset="-120"/>
+                  </a:rPr>
+                  <a:t>)</a:t>
+                </a:r>
+                <a:r>
+                  <a:rPr lang="en-US" sz="1600" b="1" dirty="0"/>
+                  <a:t>: </a:t>
+                </a:r>
+                <a:r>
+                  <a:rPr lang="en-US" sz="1600" dirty="0" err="1"/>
+                  <a:t>Stessa</a:t>
+                </a:r>
+                <a:r>
+                  <a:rPr lang="en-US" sz="1600" dirty="0"/>
+                  <a:t> </a:t>
+                </a:r>
+                <a:r>
+                  <a:rPr lang="en-US" sz="1600" dirty="0" err="1"/>
+                  <a:t>struttura</a:t>
+                </a:r>
+                <a:r>
+                  <a:rPr lang="en-US" sz="1600" dirty="0"/>
+                  <a:t>, </a:t>
+                </a:r>
+                <a:r>
+                  <a:rPr lang="en-US" sz="1600" dirty="0" err="1"/>
+                  <a:t>blocco</a:t>
+                </a:r>
+                <a:r>
+                  <a:rPr lang="en-US" sz="1600" dirty="0"/>
+                  <a:t> </a:t>
+                </a:r>
+                <a14:m>
+                  <m:oMath xmlns:m="http://schemas.openxmlformats.org/officeDocument/2006/math">
+                    <m:r>
+                      <a:rPr lang="en-US" i="1"/>
+                      <m:t>𝑊</m:t>
+                    </m:r>
+                  </m:oMath>
+                </a14:m>
+                <a:r>
+                  <a:rPr lang="en-US" sz="1600" dirty="0"/>
+                  <a:t> al </a:t>
+                </a:r>
+                <a:r>
+                  <a:rPr lang="en-US" sz="1600" dirty="0" err="1"/>
+                  <a:t>posto</a:t>
+                </a:r>
+                <a:r>
+                  <a:rPr lang="en-US" sz="1600" dirty="0"/>
+                  <a:t> di RBS: </a:t>
+                </a:r>
+                <a14:m>
+                  <m:oMath xmlns:m="http://schemas.openxmlformats.org/officeDocument/2006/math">
+                    <m:r>
+                      <a:rPr lang="en-US"/>
+                      <m:t>ℱ</m:t>
+                    </m:r>
+                    <m:r>
+                      <a:rPr lang="en-US"/>
+                      <m:t>=1 </m:t>
+                    </m:r>
+                    <m:r>
+                      <a:rPr lang="en-US" b="0" i="0" smtClean="0">
+                        <a:latin typeface="Cambria Math" panose="02040503050406030204" pitchFamily="18" charset="0"/>
+                      </a:rPr>
+                      <m:t>-</m:t>
+                    </m:r>
+                  </m:oMath>
+                </a14:m>
+                <a:r>
+                  <a:rPr lang="en-US" sz="1600" dirty="0"/>
+                  <a:t> qui il </a:t>
+                </a:r>
+                <a:r>
+                  <a:rPr lang="en-US" sz="1600" dirty="0" err="1"/>
+                  <a:t>tetto</a:t>
+                </a:r>
+                <a:r>
+                  <a:rPr lang="en-US" sz="1600" dirty="0"/>
+                  <a:t> </a:t>
+                </a:r>
+                <a:r>
+                  <a:rPr lang="en-US" sz="1600" dirty="0" err="1"/>
+                  <a:t>sparisce</a:t>
+                </a:r>
+                <a:endParaRPr lang="en-US" sz="1600" dirty="0"/>
+              </a:p>
+            </p:txBody>
+          </p:sp>
+        </mc:Choice>
+        <mc:Fallback>
+          <p:sp>
+            <p:nvSpPr>
+              <p:cNvPr id="17" name="Nota PMA esteso trmero">
+                <a:extLst>
+                  <a:ext uri="{FF2B5EF4-FFF2-40B4-BE49-F238E27FC236}">
+                    <a16:creationId xmlns:a16="http://schemas.microsoft.com/office/drawing/2014/main" id="{FCC1EC33-E840-6462-6166-E66176B5B039}"/>
+                  </a:ext>
+                </a:extLst>
+              </p:cNvPr>
+              <p:cNvSpPr txBox="1">
+                <a:spLocks noRot="1" noChangeAspect="1" noMove="1" noResize="1" noEditPoints="1" noAdjustHandles="1" noChangeArrowheads="1" noChangeShapeType="1" noTextEdit="1"/>
+              </p:cNvSpPr>
+              <p:nvPr/>
+            </p:nvSpPr>
+            <p:spPr>
+              <a:xfrm>
+                <a:off x="6341641" y="5689801"/>
+                <a:ext cx="4818888" cy="609206"/>
+              </a:xfrm>
+              <a:prstGeom prst="rect">
+                <a:avLst/>
+              </a:prstGeom>
+              <a:blipFill>
+                <a:blip r:embed="rId21"/>
+                <a:stretch>
+                  <a:fillRect l="-632" t="-3000" b="-12000"/>
+                </a:stretch>
+              </a:blipFill>
+            </p:spPr>
+            <p:txBody>
+              <a:bodyPr/>
+              <a:lstStyle/>
+              <a:p>
+                <a:r>
+                  <a:rPr lang="en-US">
+                    <a:noFill/>
+                  </a:rPr>
+                  <a:t> </a:t>
+                </a:r>
+              </a:p>
+            </p:txBody>
+          </p:sp>
+        </mc:Fallback>
+      </mc:AlternateContent>
+      <p:sp>
+        <p:nvSpPr>
+          <p:cNvPr id="18" name="Desc PMA Esteso dimero">
+            <a:extLst>
+              <a:ext uri="{FF2B5EF4-FFF2-40B4-BE49-F238E27FC236}">
+                <a16:creationId xmlns:a16="http://schemas.microsoft.com/office/drawing/2014/main" id="{A0089200-92E3-FEC5-542E-C28FECB2007F}"/>
+              </a:ext>
+            </a:extLst>
+          </p:cNvPr>
+          <p:cNvSpPr txBox="1"/>
+          <p:nvPr/>
+        </p:nvSpPr>
+        <p:spPr>
+          <a:xfrm>
+            <a:off x="1561288" y="5271883"/>
+            <a:ext cx="2925673" cy="274320"/>
+          </a:xfrm>
+          <a:prstGeom prst="rect">
+            <a:avLst/>
+          </a:prstGeom>
+          <a:noFill/>
+          <a:ln/>
+        </p:spPr>
+        <p:txBody>
+          <a:bodyPr wrap="square" lIns="0" tIns="0" rIns="0" bIns="0" rtlCol="0" anchor="ctr"/>
+          <a:lstStyle/>
+          <a:p>
+            <a:pPr marL="0" indent="0" algn="ctr">
+              <a:buNone/>
+            </a:pPr>
+            <a:r>
+              <a:rPr lang="en-US" sz="1200" i="1" dirty="0">
+                <a:solidFill>
+                  <a:srgbClr val="5B6B84"/>
+                </a:solidFill>
+                <a:latin typeface="Calibri" pitchFamily="34" charset="0"/>
+                <a:ea typeface="Calibri" pitchFamily="34" charset="-122"/>
+                <a:cs typeface="Calibri" pitchFamily="34" charset="-120"/>
+              </a:rPr>
+              <a:t>6 </a:t>
+            </a:r>
+            <a:r>
+              <a:rPr lang="en-US" sz="1200" i="1" dirty="0" err="1">
+                <a:solidFill>
+                  <a:srgbClr val="5B6B84"/>
+                </a:solidFill>
+                <a:latin typeface="Calibri" pitchFamily="34" charset="0"/>
+                <a:ea typeface="Calibri" pitchFamily="34" charset="-122"/>
+                <a:cs typeface="Calibri" pitchFamily="34" charset="-120"/>
+              </a:rPr>
+              <a:t>porte</a:t>
+            </a:r>
+            <a:r>
+              <a:rPr lang="en-US" sz="1200" i="1" dirty="0">
+                <a:solidFill>
+                  <a:srgbClr val="5B6B84"/>
+                </a:solidFill>
+                <a:latin typeface="Calibri" pitchFamily="34" charset="0"/>
+                <a:ea typeface="Calibri" pitchFamily="34" charset="-122"/>
+                <a:cs typeface="Calibri" pitchFamily="34" charset="-120"/>
+              </a:rPr>
+              <a:t> a 2 qubit, 22 </a:t>
+            </a:r>
+            <a:r>
+              <a:rPr lang="en-US" sz="1200" i="1" dirty="0" err="1">
+                <a:solidFill>
+                  <a:srgbClr val="5B6B84"/>
+                </a:solidFill>
+                <a:latin typeface="Calibri" pitchFamily="34" charset="0"/>
+                <a:ea typeface="Calibri" pitchFamily="34" charset="-122"/>
+                <a:cs typeface="Calibri" pitchFamily="34" charset="-120"/>
+              </a:rPr>
+              <a:t>porte</a:t>
+            </a:r>
+            <a:r>
+              <a:rPr lang="en-US" sz="1200" i="1" dirty="0">
+                <a:solidFill>
+                  <a:srgbClr val="5B6B84"/>
+                </a:solidFill>
+                <a:latin typeface="Calibri" pitchFamily="34" charset="0"/>
+                <a:ea typeface="Calibri" pitchFamily="34" charset="-122"/>
+                <a:cs typeface="Calibri" pitchFamily="34" charset="-120"/>
+              </a:rPr>
+              <a:t> a 1 qubit (28 </a:t>
+            </a:r>
+            <a:r>
+              <a:rPr lang="en-US" sz="1200" i="1" dirty="0" err="1">
+                <a:solidFill>
+                  <a:srgbClr val="5B6B84"/>
+                </a:solidFill>
+                <a:latin typeface="Calibri" pitchFamily="34" charset="0"/>
+                <a:ea typeface="Calibri" pitchFamily="34" charset="-122"/>
+                <a:cs typeface="Calibri" pitchFamily="34" charset="-120"/>
+              </a:rPr>
+              <a:t>totali</a:t>
+            </a:r>
+            <a:r>
+              <a:rPr lang="en-US" sz="1200" i="1" dirty="0">
+                <a:solidFill>
+                  <a:srgbClr val="5B6B84"/>
+                </a:solidFill>
+                <a:latin typeface="Calibri" pitchFamily="34" charset="0"/>
+                <a:ea typeface="Calibri" pitchFamily="34" charset="-122"/>
+                <a:cs typeface="Calibri" pitchFamily="34" charset="-120"/>
+              </a:rPr>
+              <a:t>)</a:t>
+            </a:r>
+            <a:endParaRPr lang="en-US" sz="1200" dirty="0"/>
+          </a:p>
+        </p:txBody>
+      </p:sp>
+      <p:sp>
+        <p:nvSpPr>
+          <p:cNvPr id="19" name="Desc PMA Esteso dimero">
+            <a:extLst>
+              <a:ext uri="{FF2B5EF4-FFF2-40B4-BE49-F238E27FC236}">
+                <a16:creationId xmlns:a16="http://schemas.microsoft.com/office/drawing/2014/main" id="{57D1F451-97FD-A6D3-7928-F2A4FEBFAE04}"/>
+              </a:ext>
+            </a:extLst>
+          </p:cNvPr>
+          <p:cNvSpPr txBox="1"/>
+          <p:nvPr/>
+        </p:nvSpPr>
+        <p:spPr>
+          <a:xfrm>
+            <a:off x="6601186" y="5271883"/>
+            <a:ext cx="4106438" cy="274320"/>
+          </a:xfrm>
+          <a:prstGeom prst="rect">
+            <a:avLst/>
+          </a:prstGeom>
+          <a:noFill/>
+          <a:ln/>
+        </p:spPr>
+        <p:txBody>
+          <a:bodyPr wrap="square" lIns="0" tIns="0" rIns="0" bIns="0" rtlCol="0" anchor="ctr"/>
+          <a:lstStyle/>
+          <a:p>
+            <a:pPr algn="ctr"/>
+            <a:r>
+              <a:rPr lang="en-US" sz="1200" i="1" dirty="0">
+                <a:solidFill>
+                  <a:srgbClr val="5B6B84"/>
+                </a:solidFill>
+                <a:latin typeface="Calibri" pitchFamily="34" charset="0"/>
+                <a:ea typeface="Calibri" pitchFamily="34" charset="-122"/>
+                <a:cs typeface="Calibri" pitchFamily="34" charset="-120"/>
+              </a:rPr>
+              <a:t>6 </a:t>
+            </a:r>
+            <a:r>
+              <a:rPr lang="en-US" sz="1200" i="1" dirty="0" err="1">
+                <a:solidFill>
+                  <a:srgbClr val="5B6B84"/>
+                </a:solidFill>
+                <a:latin typeface="Calibri" pitchFamily="34" charset="0"/>
+                <a:ea typeface="Calibri" pitchFamily="34" charset="-122"/>
+                <a:cs typeface="Calibri" pitchFamily="34" charset="-120"/>
+              </a:rPr>
+              <a:t>porte</a:t>
+            </a:r>
+            <a:r>
+              <a:rPr lang="en-US" sz="1200" i="1" dirty="0">
+                <a:solidFill>
+                  <a:srgbClr val="5B6B84"/>
+                </a:solidFill>
+                <a:latin typeface="Calibri" pitchFamily="34" charset="0"/>
+                <a:ea typeface="Calibri" pitchFamily="34" charset="-122"/>
+                <a:cs typeface="Calibri" pitchFamily="34" charset="-120"/>
+              </a:rPr>
+              <a:t> a 2 qubit, 7 </a:t>
+            </a:r>
+            <a:r>
+              <a:rPr lang="en-US" sz="1200" i="1" dirty="0" err="1">
+                <a:solidFill>
+                  <a:srgbClr val="5B6B84"/>
+                </a:solidFill>
+                <a:latin typeface="Calibri" pitchFamily="34" charset="0"/>
+                <a:ea typeface="Calibri" pitchFamily="34" charset="-122"/>
+                <a:cs typeface="Calibri" pitchFamily="34" charset="-120"/>
+              </a:rPr>
+              <a:t>porte</a:t>
+            </a:r>
+            <a:r>
+              <a:rPr lang="en-US" sz="1200" i="1" dirty="0">
+                <a:solidFill>
+                  <a:srgbClr val="5B6B84"/>
+                </a:solidFill>
+                <a:latin typeface="Calibri" pitchFamily="34" charset="0"/>
+                <a:ea typeface="Calibri" pitchFamily="34" charset="-122"/>
+                <a:cs typeface="Calibri" pitchFamily="34" charset="-120"/>
+              </a:rPr>
+              <a:t> a 1 qubit (13 </a:t>
+            </a:r>
+            <a:r>
+              <a:rPr lang="en-US" sz="1200" i="1" dirty="0" err="1">
+                <a:solidFill>
+                  <a:srgbClr val="5B6B84"/>
+                </a:solidFill>
+                <a:latin typeface="Calibri" pitchFamily="34" charset="0"/>
+                <a:ea typeface="Calibri" pitchFamily="34" charset="-122"/>
+                <a:cs typeface="Calibri" pitchFamily="34" charset="-120"/>
+              </a:rPr>
+              <a:t>totali</a:t>
+            </a:r>
+            <a:r>
+              <a:rPr lang="en-US" sz="1200" i="1" dirty="0">
+                <a:solidFill>
+                  <a:srgbClr val="5B6B84"/>
+                </a:solidFill>
+                <a:latin typeface="Calibri" pitchFamily="34" charset="0"/>
+                <a:ea typeface="Calibri" pitchFamily="34" charset="-122"/>
+                <a:cs typeface="Calibri" pitchFamily="34" charset="-120"/>
+              </a:rPr>
+              <a:t>) – il piu’ </a:t>
+            </a:r>
+            <a:r>
+              <a:rPr lang="en-US" sz="1200" i="1" dirty="0" err="1">
+                <a:solidFill>
+                  <a:srgbClr val="5B6B84"/>
+                </a:solidFill>
+                <a:latin typeface="Calibri" pitchFamily="34" charset="0"/>
+                <a:ea typeface="Calibri" pitchFamily="34" charset="-122"/>
+                <a:cs typeface="Calibri" pitchFamily="34" charset="-120"/>
+              </a:rPr>
+              <a:t>economico</a:t>
+            </a:r>
+            <a:endParaRPr lang="en-US" sz="1200" dirty="0"/>
+          </a:p>
+        </p:txBody>
+      </p:sp>
     </p:spTree>
   </p:cSld>
   <p:clrMapOvr>
@@ -4328,7 +5411,7 @@
                                       <p:cBhvr>
                                         <p:cTn id="39" dur="500"/>
                                         <p:tgtEl>
-                                          <p:spTgt spid="41"/>
+                                          <p:spTgt spid="5"/>
                                         </p:tgtEl>
                                       </p:cBhvr>
                                     </p:animEffect>
@@ -4340,7 +5423,7 @@
                                           </p:stCondLst>
                                         </p:cTn>
                                         <p:tgtEl>
-                                          <p:spTgt spid="41"/>
+                                          <p:spTgt spid="5"/>
                                         </p:tgtEl>
                                         <p:attrNameLst>
                                           <p:attrName>style.visibility</p:attrName>
@@ -4354,7 +5437,7 @@
                                 </p:cTn>
                               </p:par>
                               <p:par>
-                                <p:cTn id="41" presetID="10" presetClass="exit" presetSubtype="0" fill="hold" grpId="0" nodeType="withEffect">
+                                <p:cTn id="41" presetID="10" presetClass="exit" presetSubtype="0" fill="hold" nodeType="withEffect">
                                   <p:stCondLst>
                                     <p:cond delay="0"/>
                                   </p:stCondLst>
@@ -4363,7 +5446,7 @@
                                       <p:cBhvr>
                                         <p:cTn id="42" dur="500"/>
                                         <p:tgtEl>
-                                          <p:spTgt spid="5"/>
+                                          <p:spTgt spid="40"/>
                                         </p:tgtEl>
                                       </p:cBhvr>
                                     </p:animEffect>
@@ -4375,7 +5458,7 @@
                                           </p:stCondLst>
                                         </p:cTn>
                                         <p:tgtEl>
-                                          <p:spTgt spid="5"/>
+                                          <p:spTgt spid="40"/>
                                         </p:tgtEl>
                                         <p:attrNameLst>
                                           <p:attrName>style.visibility</p:attrName>
@@ -4389,7 +5472,7 @@
                                 </p:cTn>
                               </p:par>
                               <p:par>
-                                <p:cTn id="44" presetID="10" presetClass="exit" presetSubtype="0" fill="hold" nodeType="withEffect">
+                                <p:cTn id="44" presetID="10" presetClass="exit" presetSubtype="0" fill="hold" grpId="0" nodeType="withEffect">
                                   <p:stCondLst>
                                     <p:cond delay="0"/>
                                   </p:stCondLst>
@@ -4398,7 +5481,7 @@
                                       <p:cBhvr>
                                         <p:cTn id="45" dur="500"/>
                                         <p:tgtEl>
-                                          <p:spTgt spid="40"/>
+                                          <p:spTgt spid="38"/>
                                         </p:tgtEl>
                                       </p:cBhvr>
                                     </p:animEffect>
@@ -4410,7 +5493,7 @@
                                           </p:stCondLst>
                                         </p:cTn>
                                         <p:tgtEl>
-                                          <p:spTgt spid="40"/>
+                                          <p:spTgt spid="38"/>
                                         </p:tgtEl>
                                         <p:attrNameLst>
                                           <p:attrName>style.visibility</p:attrName>
@@ -4433,7 +5516,7 @@
                                       <p:cBhvr>
                                         <p:cTn id="48" dur="500"/>
                                         <p:tgtEl>
-                                          <p:spTgt spid="39"/>
+                                          <p:spTgt spid="35"/>
                                         </p:tgtEl>
                                       </p:cBhvr>
                                     </p:animEffect>
@@ -4445,7 +5528,7 @@
                                           </p:stCondLst>
                                         </p:cTn>
                                         <p:tgtEl>
-                                          <p:spTgt spid="39"/>
+                                          <p:spTgt spid="35"/>
                                         </p:tgtEl>
                                         <p:attrNameLst>
                                           <p:attrName>style.visibility</p:attrName>
@@ -4459,7 +5542,7 @@
                                 </p:cTn>
                               </p:par>
                               <p:par>
-                                <p:cTn id="50" presetID="10" presetClass="exit" presetSubtype="0" fill="hold" grpId="0" nodeType="withEffect">
+                                <p:cTn id="50" presetID="10" presetClass="exit" presetSubtype="0" fill="hold" nodeType="withEffect">
                                   <p:stCondLst>
                                     <p:cond delay="0"/>
                                   </p:stCondLst>
@@ -4468,7 +5551,7 @@
                                       <p:cBhvr>
                                         <p:cTn id="51" dur="500"/>
                                         <p:tgtEl>
-                                          <p:spTgt spid="38"/>
+                                          <p:spTgt spid="34"/>
                                         </p:tgtEl>
                                       </p:cBhvr>
                                     </p:animEffect>
@@ -4480,7 +5563,7 @@
                                           </p:stCondLst>
                                         </p:cTn>
                                         <p:tgtEl>
-                                          <p:spTgt spid="38"/>
+                                          <p:spTgt spid="34"/>
                                         </p:tgtEl>
                                         <p:attrNameLst>
                                           <p:attrName>style.visibility</p:attrName>
@@ -4503,7 +5586,7 @@
                                       <p:cBhvr>
                                         <p:cTn id="54" dur="500"/>
                                         <p:tgtEl>
-                                          <p:spTgt spid="37"/>
+                                          <p:spTgt spid="32"/>
                                         </p:tgtEl>
                                       </p:cBhvr>
                                     </p:animEffect>
@@ -4515,7 +5598,340 @@
                                           </p:stCondLst>
                                         </p:cTn>
                                         <p:tgtEl>
-                                          <p:spTgt spid="37"/>
+                                          <p:spTgt spid="32"/>
+                                        </p:tgtEl>
+                                        <p:attrNameLst>
+                                          <p:attrName>style.visibility</p:attrName>
+                                        </p:attrNameLst>
+                                      </p:cBhvr>
+                                      <p:to>
+                                        <p:strVal val="hidden"/>
+                                      </p:to>
+                                    </p:set>
+                                  </p:childTnLst>
+                                </p:cTn>
+                              </p:par>
+                            </p:childTnLst>
+                          </p:cTn>
+                        </p:par>
+                      </p:childTnLst>
+                    </p:cTn>
+                  </p:par>
+                  <p:par>
+                    <p:cTn id="56" fill="hold">
+                      <p:stCondLst>
+                        <p:cond delay="indefinite"/>
+                      </p:stCondLst>
+                      <p:childTnLst>
+                        <p:par>
+                          <p:cTn id="57" fill="hold">
+                            <p:stCondLst>
+                              <p:cond delay="0"/>
+                            </p:stCondLst>
+                            <p:childTnLst>
+                              <p:par>
+                                <p:cTn id="58" presetID="10" presetClass="entr" presetSubtype="0" fill="hold" grpId="0" nodeType="clickEffect">
+                                  <p:stCondLst>
+                                    <p:cond delay="0"/>
+                                  </p:stCondLst>
+                                  <p:childTnLst>
+                                    <p:set>
+                                      <p:cBhvr>
+                                        <p:cTn id="59" dur="1" fill="hold">
+                                          <p:stCondLst>
+                                            <p:cond delay="0"/>
+                                          </p:stCondLst>
+                                        </p:cTn>
+                                        <p:tgtEl>
+                                          <p:spTgt spid="7"/>
+                                        </p:tgtEl>
+                                        <p:attrNameLst>
+                                          <p:attrName>style.visibility</p:attrName>
+                                        </p:attrNameLst>
+                                      </p:cBhvr>
+                                      <p:to>
+                                        <p:strVal val="visible"/>
+                                      </p:to>
+                                    </p:set>
+                                    <p:animEffect transition="in" filter="fade">
+                                      <p:cBhvr>
+                                        <p:cTn id="60" dur="500"/>
+                                        <p:tgtEl>
+                                          <p:spTgt spid="7"/>
+                                        </p:tgtEl>
+                                      </p:cBhvr>
+                                    </p:animEffect>
+                                  </p:childTnLst>
+                                </p:cTn>
+                              </p:par>
+                              <p:par>
+                                <p:cTn id="61" presetID="10" presetClass="entr" presetSubtype="0" fill="hold" grpId="0" nodeType="withEffect">
+                                  <p:stCondLst>
+                                    <p:cond delay="0"/>
+                                  </p:stCondLst>
+                                  <p:childTnLst>
+                                    <p:set>
+                                      <p:cBhvr>
+                                        <p:cTn id="62" dur="1" fill="hold">
+                                          <p:stCondLst>
+                                            <p:cond delay="0"/>
+                                          </p:stCondLst>
+                                        </p:cTn>
+                                        <p:tgtEl>
+                                          <p:spTgt spid="8"/>
+                                        </p:tgtEl>
+                                        <p:attrNameLst>
+                                          <p:attrName>style.visibility</p:attrName>
+                                        </p:attrNameLst>
+                                      </p:cBhvr>
+                                      <p:to>
+                                        <p:strVal val="visible"/>
+                                      </p:to>
+                                    </p:set>
+                                    <p:animEffect transition="in" filter="fade">
+                                      <p:cBhvr>
+                                        <p:cTn id="63" dur="500"/>
+                                        <p:tgtEl>
+                                          <p:spTgt spid="8"/>
+                                        </p:tgtEl>
+                                      </p:cBhvr>
+                                    </p:animEffect>
+                                  </p:childTnLst>
+                                </p:cTn>
+                              </p:par>
+                              <p:par>
+                                <p:cTn id="64" presetID="10" presetClass="entr" presetSubtype="0" fill="hold" grpId="0" nodeType="withEffect">
+                                  <p:stCondLst>
+                                    <p:cond delay="0"/>
+                                  </p:stCondLst>
+                                  <p:childTnLst>
+                                    <p:set>
+                                      <p:cBhvr>
+                                        <p:cTn id="65" dur="1" fill="hold">
+                                          <p:stCondLst>
+                                            <p:cond delay="0"/>
+                                          </p:stCondLst>
+                                        </p:cTn>
+                                        <p:tgtEl>
+                                          <p:spTgt spid="15"/>
+                                        </p:tgtEl>
+                                        <p:attrNameLst>
+                                          <p:attrName>style.visibility</p:attrName>
+                                        </p:attrNameLst>
+                                      </p:cBhvr>
+                                      <p:to>
+                                        <p:strVal val="visible"/>
+                                      </p:to>
+                                    </p:set>
+                                    <p:animEffect transition="in" filter="fade">
+                                      <p:cBhvr>
+                                        <p:cTn id="66" dur="500"/>
+                                        <p:tgtEl>
+                                          <p:spTgt spid="15"/>
+                                        </p:tgtEl>
+                                      </p:cBhvr>
+                                    </p:animEffect>
+                                  </p:childTnLst>
+                                </p:cTn>
+                              </p:par>
+                              <p:par>
+                                <p:cTn id="67" presetID="10" presetClass="entr" presetSubtype="0" fill="hold" grpId="0" nodeType="withEffect">
+                                  <p:stCondLst>
+                                    <p:cond delay="0"/>
+                                  </p:stCondLst>
+                                  <p:childTnLst>
+                                    <p:set>
+                                      <p:cBhvr>
+                                        <p:cTn id="68" dur="1" fill="hold">
+                                          <p:stCondLst>
+                                            <p:cond delay="0"/>
+                                          </p:stCondLst>
+                                        </p:cTn>
+                                        <p:tgtEl>
+                                          <p:spTgt spid="17"/>
+                                        </p:tgtEl>
+                                        <p:attrNameLst>
+                                          <p:attrName>style.visibility</p:attrName>
+                                        </p:attrNameLst>
+                                      </p:cBhvr>
+                                      <p:to>
+                                        <p:strVal val="visible"/>
+                                      </p:to>
+                                    </p:set>
+                                    <p:animEffect transition="in" filter="fade">
+                                      <p:cBhvr>
+                                        <p:cTn id="69" dur="500"/>
+                                        <p:tgtEl>
+                                          <p:spTgt spid="17"/>
+                                        </p:tgtEl>
+                                      </p:cBhvr>
+                                    </p:animEffect>
+                                  </p:childTnLst>
+                                </p:cTn>
+                              </p:par>
+                              <p:par>
+                                <p:cTn id="70" presetID="10" presetClass="entr" presetSubtype="0" fill="hold" grpId="0" nodeType="withEffect">
+                                  <p:stCondLst>
+                                    <p:cond delay="0"/>
+                                  </p:stCondLst>
+                                  <p:childTnLst>
+                                    <p:set>
+                                      <p:cBhvr>
+                                        <p:cTn id="71" dur="1" fill="hold">
+                                          <p:stCondLst>
+                                            <p:cond delay="0"/>
+                                          </p:stCondLst>
+                                        </p:cTn>
+                                        <p:tgtEl>
+                                          <p:spTgt spid="18"/>
+                                        </p:tgtEl>
+                                        <p:attrNameLst>
+                                          <p:attrName>style.visibility</p:attrName>
+                                        </p:attrNameLst>
+                                      </p:cBhvr>
+                                      <p:to>
+                                        <p:strVal val="visible"/>
+                                      </p:to>
+                                    </p:set>
+                                    <p:animEffect transition="in" filter="fade">
+                                      <p:cBhvr>
+                                        <p:cTn id="72" dur="500"/>
+                                        <p:tgtEl>
+                                          <p:spTgt spid="18"/>
+                                        </p:tgtEl>
+                                      </p:cBhvr>
+                                    </p:animEffect>
+                                  </p:childTnLst>
+                                </p:cTn>
+                              </p:par>
+                              <p:par>
+                                <p:cTn id="73" presetID="10" presetClass="entr" presetSubtype="0" fill="hold" grpId="0" nodeType="withEffect">
+                                  <p:stCondLst>
+                                    <p:cond delay="0"/>
+                                  </p:stCondLst>
+                                  <p:childTnLst>
+                                    <p:set>
+                                      <p:cBhvr>
+                                        <p:cTn id="74" dur="1" fill="hold">
+                                          <p:stCondLst>
+                                            <p:cond delay="0"/>
+                                          </p:stCondLst>
+                                        </p:cTn>
+                                        <p:tgtEl>
+                                          <p:spTgt spid="19"/>
+                                        </p:tgtEl>
+                                        <p:attrNameLst>
+                                          <p:attrName>style.visibility</p:attrName>
+                                        </p:attrNameLst>
+                                      </p:cBhvr>
+                                      <p:to>
+                                        <p:strVal val="visible"/>
+                                      </p:to>
+                                    </p:set>
+                                    <p:animEffect transition="in" filter="fade">
+                                      <p:cBhvr>
+                                        <p:cTn id="75" dur="500"/>
+                                        <p:tgtEl>
+                                          <p:spTgt spid="19"/>
+                                        </p:tgtEl>
+                                      </p:cBhvr>
+                                    </p:animEffect>
+                                  </p:childTnLst>
+                                </p:cTn>
+                              </p:par>
+                              <p:par>
+                                <p:cTn id="76" presetID="10" presetClass="entr" presetSubtype="0" fill="hold" nodeType="withEffect">
+                                  <p:stCondLst>
+                                    <p:cond delay="0"/>
+                                  </p:stCondLst>
+                                  <p:childTnLst>
+                                    <p:set>
+                                      <p:cBhvr>
+                                        <p:cTn id="77" dur="1" fill="hold">
+                                          <p:stCondLst>
+                                            <p:cond delay="0"/>
+                                          </p:stCondLst>
+                                        </p:cTn>
+                                        <p:tgtEl>
+                                          <p:spTgt spid="12"/>
+                                        </p:tgtEl>
+                                        <p:attrNameLst>
+                                          <p:attrName>style.visibility</p:attrName>
+                                        </p:attrNameLst>
+                                      </p:cBhvr>
+                                      <p:to>
+                                        <p:strVal val="visible"/>
+                                      </p:to>
+                                    </p:set>
+                                    <p:animEffect transition="in" filter="fade">
+                                      <p:cBhvr>
+                                        <p:cTn id="78" dur="500"/>
+                                        <p:tgtEl>
+                                          <p:spTgt spid="12"/>
+                                        </p:tgtEl>
+                                      </p:cBhvr>
+                                    </p:animEffect>
+                                  </p:childTnLst>
+                                </p:cTn>
+                              </p:par>
+                              <p:par>
+                                <p:cTn id="79" presetID="10" presetClass="entr" presetSubtype="0" fill="hold" nodeType="withEffect">
+                                  <p:stCondLst>
+                                    <p:cond delay="0"/>
+                                  </p:stCondLst>
+                                  <p:childTnLst>
+                                    <p:set>
+                                      <p:cBhvr>
+                                        <p:cTn id="80" dur="1" fill="hold">
+                                          <p:stCondLst>
+                                            <p:cond delay="0"/>
+                                          </p:stCondLst>
+                                        </p:cTn>
+                                        <p:tgtEl>
+                                          <p:spTgt spid="10"/>
+                                        </p:tgtEl>
+                                        <p:attrNameLst>
+                                          <p:attrName>style.visibility</p:attrName>
+                                        </p:attrNameLst>
+                                      </p:cBhvr>
+                                      <p:to>
+                                        <p:strVal val="visible"/>
+                                      </p:to>
+                                    </p:set>
+                                    <p:animEffect transition="in" filter="fade">
+                                      <p:cBhvr>
+                                        <p:cTn id="81" dur="500"/>
+                                        <p:tgtEl>
+                                          <p:spTgt spid="10"/>
+                                        </p:tgtEl>
+                                      </p:cBhvr>
+                                    </p:animEffect>
+                                  </p:childTnLst>
+                                </p:cTn>
+                              </p:par>
+                              <p:par>
+                                <p:cTn id="82" presetID="10" presetClass="exit" presetSubtype="0" fill="hold" grpId="1" nodeType="withEffect">
+                                  <p:stCondLst>
+                                    <p:cond delay="0"/>
+                                  </p:stCondLst>
+                                  <p:childTnLst>
+                                    <p:animEffect transition="out" filter="fade">
+                                      <p:cBhvr>
+                                        <p:cTn id="83" dur="500"/>
+                                        <p:tgtEl>
+                                          <p:spTgt spid="43"/>
+                                        </p:tgtEl>
+                                      </p:cBhvr>
+                                    </p:animEffect>
+                                    <p:set>
+                                      <p:cBhvr>
+                                        <p:cTn id="84" dur="1" fill="hold">
+                                          <p:stCondLst>
+                                            <p:cond delay="499"/>
+                                          </p:stCondLst>
+                                        </p:cTn>
+                                        <p:tgtEl>
+                                          <p:spTgt spid="43"/>
                                         </p:tgtEl>
                                         <p:attrNameLst>
                                           <p:attrName>style.visibility</p:attrName>
@@ -4529,28 +5945,28 @@
                                 </p:cTn>
                               </p:par>
                               <p:par>
-                                <p:cTn id="56" presetID="10" presetClass="exit" presetSubtype="0" fill="hold" grpId="0" nodeType="withEffect">
+                                <p:cTn id="85" presetID="10" presetClass="exit" presetSubtype="0" fill="hold" nodeType="withEffect">
                                   <p:stCondLst>
                                     <p:cond delay="0"/>
                                   </p:stCondLst>
                                   <p:childTnLst>
                                     <p:animEffect transition="out" filter="fade">
                                       <p:cBhvr>
-                                        <p:cTn id="57" dur="500"/>
-                                        <p:tgtEl>
-                                          <p:spTgt spid="35"/>
+                                        <p:cTn id="86" dur="500"/>
+                                        <p:tgtEl>
+                                          <p:spTgt spid="45"/>
                                         </p:tgtEl>
                                       </p:cBhvr>
                                     </p:animEffect>
                                     <p:set>
                                       <p:cBhvr>
-                                        <p:cTn id="58" dur="1" fill="hold">
+                                        <p:cTn id="87" dur="1" fill="hold">
                                           <p:stCondLst>
                                             <p:cond delay="499"/>
                                           </p:stCondLst>
                                         </p:cTn>
                                         <p:tgtEl>
-                                          <p:spTgt spid="35"/>
+                                          <p:spTgt spid="45"/>
                                         </p:tgtEl>
                                         <p:attrNameLst>
                                           <p:attrName>style.visibility</p:attrName>
@@ -4564,28 +5980,28 @@
                                 </p:cTn>
                               </p:par>
                               <p:par>
-                                <p:cTn id="59" presetID="10" presetClass="exit" presetSubtype="0" fill="hold" nodeType="withEffect">
+                                <p:cTn id="88" presetID="10" presetClass="exit" presetSubtype="0" fill="hold" nodeType="withEffect">
                                   <p:stCondLst>
                                     <p:cond delay="0"/>
                                   </p:stCondLst>
                                   <p:childTnLst>
                                     <p:animEffect transition="out" filter="fade">
                                       <p:cBhvr>
-                                        <p:cTn id="60" dur="500"/>
-                                        <p:tgtEl>
-                                          <p:spTgt spid="34"/>
+                                        <p:cTn id="89" dur="500"/>
+                                        <p:tgtEl>
+                                          <p:spTgt spid="47"/>
                                         </p:tgtEl>
                                       </p:cBhvr>
                                     </p:animEffect>
                                     <p:set>
                                       <p:cBhvr>
-                                        <p:cTn id="61" dur="1" fill="hold">
+                                        <p:cTn id="90" dur="1" fill="hold">
                                           <p:stCondLst>
                                             <p:cond delay="499"/>
                                           </p:stCondLst>
                                         </p:cTn>
                                         <p:tgtEl>
-                                          <p:spTgt spid="34"/>
+                                          <p:spTgt spid="47"/>
                                         </p:tgtEl>
                                         <p:attrNameLst>
                                           <p:attrName>style.visibility</p:attrName>
@@ -4599,28 +6015,273 @@
                                 </p:cTn>
                               </p:par>
                               <p:par>
-                                <p:cTn id="62" presetID="10" presetClass="exit" presetSubtype="0" fill="hold" nodeType="withEffect">
+                                <p:cTn id="91" presetID="10" presetClass="exit" presetSubtype="0" fill="hold" nodeType="withEffect">
                                   <p:stCondLst>
                                     <p:cond delay="0"/>
                                   </p:stCondLst>
                                   <p:childTnLst>
                                     <p:animEffect transition="out" filter="fade">
                                       <p:cBhvr>
-                                        <p:cTn id="63" dur="500"/>
-                                        <p:tgtEl>
-                                          <p:spTgt spid="32"/>
+                                        <p:cTn id="92" dur="500"/>
+                                        <p:tgtEl>
+                                          <p:spTgt spid="49"/>
                                         </p:tgtEl>
                                       </p:cBhvr>
                                     </p:animEffect>
                                     <p:set>
                                       <p:cBhvr>
-                                        <p:cTn id="64" dur="1" fill="hold">
+                                        <p:cTn id="93" dur="1" fill="hold">
                                           <p:stCondLst>
                                             <p:cond delay="499"/>
                                           </p:stCondLst>
                                         </p:cTn>
                                         <p:tgtEl>
-                                          <p:spTgt spid="32"/>
+                                          <p:spTgt spid="49"/>
+                                        </p:tgtEl>
+                                        <p:attrNameLst>
+                                          <p:attrName>style.visibility</p:attrName>
+                                        </p:attrNameLst>
+                                      </p:cBhvr>
+                                      <p:to>
+                                        <p:strVal val="hidden"/>
+                                      </p:to>
+                                    </p:set>
+                                  </p:childTnLst>
+                                </p:cTn>
+                              </p:par>
+                              <p:par>
+                                <p:cTn id="94" presetID="10" presetClass="exit" presetSubtype="0" fill="hold" grpId="1" nodeType="withEffect">
+                                  <p:stCondLst>
+                                    <p:cond delay="0"/>
+                                  </p:stCondLst>
+                                  <p:childTnLst>
+                                    <p:animEffect transition="out" filter="fade">
+                                      <p:cBhvr>
+                                        <p:cTn id="95" dur="500"/>
+                                        <p:tgtEl>
+                                          <p:spTgt spid="51"/>
+                                        </p:tgtEl>
+                                      </p:cBhvr>
+                                    </p:animEffect>
+                                    <p:set>
+                                      <p:cBhvr>
+                                        <p:cTn id="96" dur="1" fill="hold">
+                                          <p:stCondLst>
+                                            <p:cond delay="499"/>
+                                          </p:stCondLst>
+                                        </p:cTn>
+                                        <p:tgtEl>
+                                          <p:spTgt spid="51"/>
+                                        </p:tgtEl>
+                                        <p:attrNameLst>
+                                          <p:attrName>style.visibility</p:attrName>
+                                        </p:attrNameLst>
+                                      </p:cBhvr>
+                                      <p:to>
+                                        <p:strVal val="hidden"/>
+                                      </p:to>
+                                    </p:set>
+                                  </p:childTnLst>
+                                </p:cTn>
+                              </p:par>
+                              <p:par>
+                                <p:cTn id="97" presetID="10" presetClass="exit" presetSubtype="0" fill="hold" grpId="1" nodeType="withEffect">
+                                  <p:stCondLst>
+                                    <p:cond delay="0"/>
+                                  </p:stCondLst>
+                                  <p:childTnLst>
+                                    <p:animEffect transition="out" filter="fade">
+                                      <p:cBhvr>
+                                        <p:cTn id="98" dur="500"/>
+                                        <p:tgtEl>
+                                          <p:spTgt spid="55"/>
+                                        </p:tgtEl>
+                                      </p:cBhvr>
+                                    </p:animEffect>
+                                    <p:set>
+                                      <p:cBhvr>
+                                        <p:cTn id="99" dur="1" fill="hold">
+                                          <p:stCondLst>
+                                            <p:cond delay="499"/>
+                                          </p:stCondLst>
+                                        </p:cTn>
+                                        <p:tgtEl>
+                                          <p:spTgt spid="55"/>
+                                        </p:tgtEl>
+                                        <p:attrNameLst>
+                                          <p:attrName>style.visibility</p:attrName>
+                                        </p:attrNameLst>
+                                      </p:cBhvr>
+                                      <p:to>
+                                        <p:strVal val="hidden"/>
+                                      </p:to>
+                                    </p:set>
+                                  </p:childTnLst>
+                                </p:cTn>
+                              </p:par>
+                              <p:par>
+                                <p:cTn id="100" presetID="10" presetClass="exit" presetSubtype="0" fill="hold" grpId="1" nodeType="withEffect">
+                                  <p:stCondLst>
+                                    <p:cond delay="0"/>
+                                  </p:stCondLst>
+                                  <p:childTnLst>
+                                    <p:animEffect transition="out" filter="fade">
+                                      <p:cBhvr>
+                                        <p:cTn id="101" dur="500"/>
+                                        <p:tgtEl>
+                                          <p:spTgt spid="57"/>
+                                        </p:tgtEl>
+                                      </p:cBhvr>
+                                    </p:animEffect>
+                                    <p:set>
+                                      <p:cBhvr>
+                                        <p:cTn id="102" dur="1" fill="hold">
+                                          <p:stCondLst>
+                                            <p:cond delay="499"/>
+                                          </p:stCondLst>
+                                        </p:cTn>
+                                        <p:tgtEl>
+                                          <p:spTgt spid="57"/>
+                                        </p:tgtEl>
+                                        <p:attrNameLst>
+                                          <p:attrName>style.visibility</p:attrName>
+                                        </p:attrNameLst>
+                                      </p:cBhvr>
+                                      <p:to>
+                                        <p:strVal val="hidden"/>
+                                      </p:to>
+                                    </p:set>
+                                  </p:childTnLst>
+                                </p:cTn>
+                              </p:par>
+                              <p:par>
+                                <p:cTn id="103" presetID="10" presetClass="exit" presetSubtype="0" fill="hold" grpId="1" nodeType="withEffect">
+                                  <p:stCondLst>
+                                    <p:cond delay="0"/>
+                                  </p:stCondLst>
+                                  <p:childTnLst>
+                                    <p:animEffect transition="out" filter="fade">
+                                      <p:cBhvr>
+                                        <p:cTn id="104" dur="500"/>
+                                        <p:tgtEl>
+                                          <p:spTgt spid="58"/>
+                                        </p:tgtEl>
+                                      </p:cBhvr>
+                                    </p:animEffect>
+                                    <p:set>
+                                      <p:cBhvr>
+                                        <p:cTn id="105" dur="1" fill="hold">
+                                          <p:stCondLst>
+                                            <p:cond delay="499"/>
+                                          </p:stCondLst>
+                                        </p:cTn>
+                                        <p:tgtEl>
+                                          <p:spTgt spid="58"/>
+                                        </p:tgtEl>
+                                        <p:attrNameLst>
+                                          <p:attrName>style.visibility</p:attrName>
+                                        </p:attrNameLst>
+                                      </p:cBhvr>
+                                      <p:to>
+                                        <p:strVal val="hidden"/>
+                                      </p:to>
+                                    </p:set>
+                                  </p:childTnLst>
+                                </p:cTn>
+                              </p:par>
+                              <p:par>
+                                <p:cTn id="106" presetID="10" presetClass="exit" presetSubtype="0" fill="hold" grpId="1" nodeType="withEffect">
+                                  <p:stCondLst>
+                                    <p:cond delay="0"/>
+                                  </p:stCondLst>
+                                  <p:childTnLst>
+                                    <p:animEffect transition="out" filter="fade">
+                                      <p:cBhvr>
+                                        <p:cTn id="107" dur="500"/>
+                                        <p:tgtEl>
+                                          <p:spTgt spid="59"/>
+                                        </p:tgtEl>
+                                      </p:cBhvr>
+                                    </p:animEffect>
+                                    <p:set>
+                                      <p:cBhvr>
+                                        <p:cTn id="108" dur="1" fill="hold">
+                                          <p:stCondLst>
+                                            <p:cond delay="499"/>
+                                          </p:stCondLst>
+                                        </p:cTn>
+                                        <p:tgtEl>
+                                          <p:spTgt spid="59"/>
+                                        </p:tgtEl>
+                                        <p:attrNameLst>
+                                          <p:attrName>style.visibility</p:attrName>
+                                        </p:attrNameLst>
+                                      </p:cBhvr>
+                                      <p:to>
+                                        <p:strVal val="hidden"/>
+                                      </p:to>
+                                    </p:set>
+                                  </p:childTnLst>
+                                </p:cTn>
+                              </p:par>
+                              <p:par>
+                                <p:cTn id="109" presetID="10" presetClass="exit" presetSubtype="0" fill="hold" grpId="1" nodeType="withEffect">
+                                  <p:stCondLst>
+                                    <p:cond delay="0"/>
+                                  </p:stCondLst>
+                                  <p:childTnLst>
+                                    <p:animEffect transition="out" filter="fade">
+                                      <p:cBhvr>
+                                        <p:cTn id="110" dur="500"/>
+                                        <p:tgtEl>
+                                          <p:spTgt spid="60"/>
+                                        </p:tgtEl>
+                                      </p:cBhvr>
+                                    </p:animEffect>
+                                    <p:set>
+                                      <p:cBhvr>
+                                        <p:cTn id="111" dur="1" fill="hold">
+                                          <p:stCondLst>
+                                            <p:cond delay="499"/>
+                                          </p:stCondLst>
+                                        </p:cTn>
+                                        <p:tgtEl>
+                                          <p:spTgt spid="60"/>
+                                        </p:tgtEl>
+                                        <p:attrNameLst>
+                                          <p:attrName>style.visibility</p:attrName>
+                                        </p:attrNameLst>
+                                      </p:cBhvr>
+                                      <p:to>
+                                        <p:strVal val="hidden"/>
+                                      </p:to>
+                                    </p:set>
+                                  </p:childTnLst>
+                                </p:cTn>
+                              </p:par>
+                              <p:par>
+                                <p:cTn id="112" presetID="10" presetClass="exit" presetSubtype="0" fill="hold" grpId="1" nodeType="withEffect">
+                                  <p:stCondLst>
+                                    <p:cond delay="0"/>
+                                  </p:stCondLst>
+                                  <p:childTnLst>
+                                    <p:animEffect transition="out" filter="fade">
+                                      <p:cBhvr>
+                                        <p:cTn id="113" dur="500"/>
+                                        <p:tgtEl>
+                                          <p:spTgt spid="61"/>
+                                        </p:tgtEl>
+                                      </p:cBhvr>
+                                    </p:animEffect>
+                                    <p:set>
+                                      <p:cBhvr>
+                                        <p:cTn id="114" dur="1" fill="hold">
+                                          <p:stCondLst>
+                                            <p:cond delay="499"/>
+                                          </p:stCondLst>
+                                        </p:cTn>
+                                        <p:tgtEl>
+                                          <p:spTgt spid="61"/>
                                         </p:tgtEl>
                                         <p:attrNameLst>
                                           <p:attrName>style.visibility</p:attrName>
@@ -4664,16 +6325,28 @@
       <p:bldP spid="5" grpId="0" animBg="1"/>
       <p:bldP spid="35" grpId="0"/>
       <p:bldP spid="38" grpId="0"/>
-      <p:bldP spid="39" grpId="0"/>
-      <p:bldP spid="41" grpId="0"/>
       <p:bldP spid="43" grpId="0"/>
+      <p:bldP spid="43" grpId="1"/>
       <p:bldP spid="51" grpId="0" animBg="1"/>
+      <p:bldP spid="51" grpId="1" animBg="1"/>
       <p:bldP spid="55" grpId="0" animBg="1"/>
+      <p:bldP spid="55" grpId="1" animBg="1"/>
       <p:bldP spid="57" grpId="0" animBg="1"/>
+      <p:bldP spid="57" grpId="1" animBg="1"/>
       <p:bldP spid="58" grpId="0"/>
+      <p:bldP spid="58" grpId="1"/>
       <p:bldP spid="59" grpId="0"/>
+      <p:bldP spid="59" grpId="1"/>
       <p:bldP spid="60" grpId="0"/>
+      <p:bldP spid="60" grpId="1"/>
       <p:bldP spid="61" grpId="0"/>
+      <p:bldP spid="61" grpId="1"/>
+      <p:bldP spid="7" grpId="0"/>
+      <p:bldP spid="8" grpId="0"/>
+      <p:bldP spid="15" grpId="0"/>
+      <p:bldP spid="17" grpId="0"/>
+      <p:bldP spid="18" grpId="0" animBg="1"/>
+      <p:bldP spid="19" grpId="0" animBg="1"/>
     </p:bldLst>
   </p:timing>
 </p:sld>
